--- a/blackhat-2026-adversarial-ai/opener/slides/Opener.pptx
+++ b/blackhat-2026-adversarial-ai/opener/slides/Opener.pptx
@@ -4,6 +4,9 @@
   <p:sldMasterIdLst>
     <p:sldMasterId id="2147483648" r:id="rId1"/>
   </p:sldMasterIdLst>
+  <p:notesMasterIdLst>
+    <p:notesMasterId r:id="rId13"/>
+  </p:notesMasterIdLst>
   <p:sldIdLst>
     <p:sldId id="256" r:id="rId2"/>
     <p:sldId id="257" r:id="rId3"/>
@@ -17,9 +20,6 @@
     <p:sldId id="265" r:id="rId11"/>
     <p:sldId id="266" r:id="rId12"/>
   </p:sldIdLst>
-  <p:notesMasterIdLst>
-    <p:notesMasterId r:id="rId13"/>
-  </p:notesMasterIdLst>
   <p:sldSz cx="18288000" cy="10287000"/>
   <p:notesSz cx="10287000" cy="18288000"/>
   <p:defaultTextStyle>
@@ -114,6 +114,11 @@
       </a:defRPr>
     </a:lvl9pPr>
   </p:defaultTextStyle>
+  <p:extLst>
+    <p:ext uri="{EFAFB233-063F-42B5-8137-9DF3F51BA10A}">
+      <p15:sldGuideLst xmlns:p15="http://schemas.microsoft.com/office/powerpoint/2012/main"/>
+    </p:ext>
+  </p:extLst>
 </p:presentation>
 </file>
 
@@ -139,234 +144,10 @@
           <a:chExt cx="0" cy="0"/>
         </a:xfrm>
       </p:grpSpPr>
-      <p:sp>
-        <p:nvSpPr>
-          <p:cNvPr id="2" name="Header Placeholder 1"/>
-          <p:cNvSpPr>
-            <a:spLocks noGrp="1"/>
-          </p:cNvSpPr>
-          <p:nvPr>
-            <p:ph type="hdr" sz="quarter"/>
-          </p:nvPr>
-        </p:nvSpPr>
-        <p:spPr>
-          <a:xfrm>
-            <a:off x="0" y="0"/>
-            <a:ext cx="2971800" cy="458788"/>
-          </a:xfrm>
-          <a:prstGeom prst="rect">
-            <a:avLst/>
-          </a:prstGeom>
-        </p:spPr>
-        <p:txBody>
-          <a:bodyPr vert="horz" lIns="91440" tIns="45720" rIns="91440" bIns="45720" rtlCol="0"/>
-          <a:lstStyle>
-            <a:lvl1pPr algn="l">
-              <a:defRPr sz="1200"/>
-            </a:lvl1pPr>
-          </a:lstStyle>
-          <a:p>
-            <a:endParaRPr lang="en-US"/>
-          </a:p>
-        </p:txBody>
-      </p:sp>
-      <p:sp>
-        <p:nvSpPr>
-          <p:cNvPr id="3" name="Date Placeholder 2"/>
-          <p:cNvSpPr>
-            <a:spLocks noGrp="1"/>
-          </p:cNvSpPr>
-          <p:nvPr>
-            <p:ph type="dt" idx="1"/>
-          </p:nvPr>
-        </p:nvSpPr>
-        <p:spPr>
-          <a:xfrm>
-            <a:off x="3884613" y="0"/>
-            <a:ext cx="2971800" cy="458788"/>
-          </a:xfrm>
-          <a:prstGeom prst="rect">
-            <a:avLst/>
-          </a:prstGeom>
-        </p:spPr>
-        <p:txBody>
-          <a:bodyPr vert="horz" lIns="91440" tIns="45720" rIns="91440" bIns="45720" rtlCol="0"/>
-          <a:lstStyle>
-            <a:lvl1pPr algn="r">
-              <a:defRPr sz="1200"/>
-            </a:lvl1pPr>
-          </a:lstStyle>
-          <a:p>
-            <a:fld id="{5282F153-3F37-0F45-9E97-73ACFA13230C}" type="datetimeFigureOut">
-              <a:rPr lang="en-US"/>
-              <a:t>7/23/19</a:t>
-            </a:fld>
-            <a:endParaRPr lang="en-US"/>
-          </a:p>
-        </p:txBody>
-      </p:sp>
-      <p:sp>
-        <p:nvSpPr>
-          <p:cNvPr id="4" name="Slide Image Placeholder 3"/>
-          <p:cNvSpPr>
-            <a:spLocks noGrp="1" noRot="1" noChangeAspect="1"/>
-          </p:cNvSpPr>
-          <p:nvPr>
-            <p:ph type="sldImg" idx="2"/>
-          </p:nvPr>
-        </p:nvSpPr>
-        <p:spPr>
-          <a:xfrm>
-            <a:off x="685800" y="1143000"/>
-            <a:ext cx="5486400" cy="3086100"/>
-          </a:xfrm>
-          <a:prstGeom prst="rect">
-            <a:avLst/>
-          </a:prstGeom>
-          <a:noFill/>
-          <a:ln w="12700">
-            <a:solidFill>
-              <a:prstClr val="black"/>
-            </a:solidFill>
-          </a:ln>
-        </p:spPr>
-        <p:txBody>
-          <a:bodyPr vert="horz" lIns="91440" tIns="45720" rIns="91440" bIns="45720" rtlCol="0" anchor="ctr"/>
-          <a:lstStyle/>
-          <a:p>
-            <a:endParaRPr lang="en-US"/>
-          </a:p>
-        </p:txBody>
-      </p:sp>
-      <p:sp>
-        <p:nvSpPr>
-          <p:cNvPr id="5" name="Notes Placeholder 4"/>
-          <p:cNvSpPr>
-            <a:spLocks noGrp="1"/>
-          </p:cNvSpPr>
-          <p:nvPr>
-            <p:ph type="body" sz="quarter" idx="3"/>
-          </p:nvPr>
-        </p:nvSpPr>
-        <p:spPr>
-          <a:xfrm>
-            <a:off x="685800" y="4400550"/>
-            <a:ext cx="5486400" cy="3600450"/>
-          </a:xfrm>
-          <a:prstGeom prst="rect">
-            <a:avLst/>
-          </a:prstGeom>
-        </p:spPr>
-        <p:txBody>
-          <a:bodyPr vert="horz" lIns="91440" tIns="45720" rIns="91440" bIns="45720" rtlCol="0"/>
-          <a:lstStyle/>
-          <a:p>
-            <a:pPr lvl="0"/>
-            <a:r>
-              <a:rPr lang="en-US"/>
-              <a:t>Click to edit Master text styles</a:t>
-            </a:r>
-          </a:p>
-          <a:p>
-            <a:pPr lvl="1"/>
-            <a:r>
-              <a:rPr lang="en-US"/>
-              <a:t>Second level</a:t>
-            </a:r>
-          </a:p>
-          <a:p>
-            <a:pPr lvl="2"/>
-            <a:r>
-              <a:rPr lang="en-US"/>
-              <a:t>Third level</a:t>
-            </a:r>
-          </a:p>
-          <a:p>
-            <a:pPr lvl="3"/>
-            <a:r>
-              <a:rPr lang="en-US"/>
-              <a:t>Fourth level</a:t>
-            </a:r>
-          </a:p>
-          <a:p>
-            <a:pPr lvl="4"/>
-            <a:r>
-              <a:rPr lang="en-US"/>
-              <a:t>Fifth level</a:t>
-            </a:r>
-          </a:p>
-        </p:txBody>
-      </p:sp>
-      <p:sp>
-        <p:nvSpPr>
-          <p:cNvPr id="6" name="Footer Placeholder 5"/>
-          <p:cNvSpPr>
-            <a:spLocks noGrp="1"/>
-          </p:cNvSpPr>
-          <p:nvPr>
-            <p:ph type="ftr" sz="quarter" idx="4"/>
-          </p:nvPr>
-        </p:nvSpPr>
-        <p:spPr>
-          <a:xfrm>
-            <a:off x="0" y="8685213"/>
-            <a:ext cx="2971800" cy="458787"/>
-          </a:xfrm>
-          <a:prstGeom prst="rect">
-            <a:avLst/>
-          </a:prstGeom>
-        </p:spPr>
-        <p:txBody>
-          <a:bodyPr vert="horz" lIns="91440" tIns="45720" rIns="91440" bIns="45720" rtlCol="0" anchor="b"/>
-          <a:lstStyle>
-            <a:lvl1pPr algn="l">
-              <a:defRPr sz="1200"/>
-            </a:lvl1pPr>
-          </a:lstStyle>
-          <a:p>
-            <a:endParaRPr lang="en-US"/>
-          </a:p>
-        </p:txBody>
-      </p:sp>
-      <p:sp>
-        <p:nvSpPr>
-          <p:cNvPr id="7" name="Slide Number Placeholder 6"/>
-          <p:cNvSpPr>
-            <a:spLocks noGrp="1"/>
-          </p:cNvSpPr>
-          <p:nvPr>
-            <p:ph type="sldNum" sz="quarter" idx="5"/>
-          </p:nvPr>
-        </p:nvSpPr>
-        <p:spPr>
-          <a:xfrm>
-            <a:off x="3884613" y="8685213"/>
-            <a:ext cx="2971800" cy="458787"/>
-          </a:xfrm>
-          <a:prstGeom prst="rect">
-            <a:avLst/>
-          </a:prstGeom>
-        </p:spPr>
-        <p:txBody>
-          <a:bodyPr vert="horz" lIns="91440" tIns="45720" rIns="91440" bIns="45720" rtlCol="0" anchor="b"/>
-          <a:lstStyle>
-            <a:lvl1pPr algn="r">
-              <a:defRPr sz="1200"/>
-            </a:lvl1pPr>
-          </a:lstStyle>
-          <a:p>
-            <a:fld id="{CE5E9CC1-C706-0F49-92D6-E571CC5EEA8F}" type="slidenum">
-              <a:rPr lang="en-US"/>
-              <a:t>‹#›</a:t>
-            </a:fld>
-            <a:endParaRPr lang="en-US"/>
-          </a:p>
-        </p:txBody>
-      </p:sp>
     </p:spTree>
     <p:extLst>
       <p:ext uri="{BB962C8B-B14F-4D97-AF65-F5344CB8AC3E}">
-        <p14:creationId xmlns:p14="http://schemas.microsoft.com/office/powerpoint/2010/main" val="1024086991"/>
+        <p14:creationId xmlns:p14="http://schemas.microsoft.com/office/powerpoint/2010/main" val="3182551099"/>
       </p:ext>
     </p:extLst>
   </p:cSld>
@@ -510,10 +291,6 @@
           <a:bodyPr/>
           <a:lstStyle/>
           <a:p>
-            <a:r>
-              <a:rPr lang="en-US" dirty="0"/>
-              <a:t>Warm open. One sentence: for two days you will attack one AI application across every layer it is built from, then secure each one. Set the tone now — this is a lab, not a lecture; you will spend most of your time in the browser breaking things.</a:t>
-            </a:r>
             <a:endParaRPr lang="en-US" dirty="0"/>
           </a:p>
         </p:txBody>
@@ -598,10 +375,6 @@
           <a:bodyPr/>
           <a:lstStyle/>
           <a:p>
-            <a:r>
-              <a:rPr lang="en-US" dirty="0"/>
-              <a:t>The ethics line matters at Black Hat — say it plainly. Then get out of the way: the reach-test and M0 are next.</a:t>
-            </a:r>
             <a:endParaRPr lang="en-US" dirty="0"/>
           </a:p>
         </p:txBody>
@@ -686,10 +459,6 @@
           <a:bodyPr/>
           <a:lstStyle/>
           <a:p>
-            <a:r>
-              <a:rPr lang="en-US" dirty="0"/>
-              <a:t>Hard cut to M0. Gandalf is the self-serve warm-up — prompt injection and guardrail evasion in miniature, foreshadowing M1 and M8; anyone who cracks it early moves to the other Lakera games or Prompt Airlines. Momentum is everything in the first 15 minutes.</a:t>
-            </a:r>
             <a:endParaRPr lang="en-US" dirty="0"/>
           </a:p>
         </p:txBody>
@@ -774,10 +543,6 @@
           <a:bodyPr/>
           <a:lstStyle/>
           <a:p>
-            <a:r>
-              <a:rPr lang="en-US" dirty="0"/>
-              <a:t>The single-target, growing-surface design is the whole pedagogy — one coherent story instead of eight disconnected toys. Build/Break/Secure is the rhythm of every module. Say it once here and they will recognise it all day.</a:t>
-            </a:r>
             <a:endParaRPr lang="en-US" dirty="0"/>
           </a:p>
         </p:txBody>
@@ -862,10 +627,6 @@
           <a:bodyPr/>
           <a:lstStyle/>
           <a:p>
-            <a:r>
-              <a:rPr lang="en-US" dirty="0"/>
-              <a:t>This mirrors the run of show exactly. Day 1 is the model and its data — F0 foundations, then L0 chatbot (M1 injection, M2 output), L1 RAG (M3), L2 agent (M4 supply chain, M5 excessive agency) — all keyless on the shared model. Day 2 is the model with hands — L3 MCP (M6), L4 multi-agent (M7), L5 production plus the AI-vs-AI finale (M8). Set BYOK loudly: M6 poisoning and the finale need a frontier key to chain tool calls reliably; keyless llama shows the plumbing and is actually the more reliable choice for M5/M7. Anyone without a key: pair up. Note L2 (agent) is on Day 1 and runs keyless — M5 is a simple single tool-call the shared model handles. The BYOK line is really about M6 and the finale.</a:t>
-            </a:r>
             <a:endParaRPr lang="en-US" dirty="0"/>
           </a:p>
         </p:txBody>
@@ -950,10 +711,6 @@
           <a:bodyPr/>
           <a:lstStyle/>
           <a:p>
-            <a:r>
-              <a:rPr lang="en-US" dirty="0"/>
-              <a:t>New for this cohort — name the builder lane as a real choice, not a footnote. Most will attack the hosted app; the roughly one-third who want a methodology to take home run the code locally and read the actual guard. The builder lane is the on-ramp to the same Claude-Code-against-real-code method you will watch with Anna — the direct answer to: can I use this in my own environment?</a:t>
-            </a:r>
             <a:endParaRPr lang="en-US" dirty="0"/>
           </a:p>
         </p:txBody>
@@ -1038,10 +795,6 @@
           <a:bodyPr/>
           <a:lstStyle/>
           <a:p>
-            <a:r>
-              <a:rPr lang="en-US" dirty="0"/>
-              <a:t>This is the spine of the rebuilt flow — same five beats every module, so nobody is lost about where we are. Beats 3 and 4 are the hands-on core; Secure is never sacrificed for time. Beat 5 (Anna) lands at four points across the two days. Mechanism not words is why 32 people attacking a non-deterministic model grades reliably — and it is how they should instrument their own AI for detection.</a:t>
-            </a:r>
             <a:endParaRPr lang="en-US" dirty="0"/>
           </a:p>
         </p:txBody>
@@ -1126,10 +879,6 @@
           <a:bodyPr/>
           <a:lstStyle/>
           <a:p>
-            <a:r>
-              <a:rPr lang="en-US" dirty="0"/>
-              <a:t>The through-line and the energiser — introduce Anna now (Anchor 1). The room raises hypotheses and we investigate live at L0/L1, then L3 (MCP) and L4 (multi-agent). This is the direct answer to the recurring ask — can I use this in my own environment? — yes, and this is exactly how. Keep the intro to a minute; the payoff is the live investigations.</a:t>
-            </a:r>
             <a:endParaRPr lang="en-US" dirty="0"/>
           </a:p>
         </p:txBody>
@@ -1214,10 +963,6 @@
           <a:bodyPr/>
           <a:lstStyle/>
           <a:p>
-            <a:r>
-              <a:rPr lang="en-US" dirty="0"/>
-              <a:t>Keep it to 30 seconds; the room cares more about what they will do today than your CV. Add any founding or career highlights you want to call out here.</a:t>
-            </a:r>
             <a:endParaRPr lang="en-US" dirty="0"/>
           </a:p>
         </p:txBody>
@@ -1302,10 +1047,6 @@
           <a:bodyPr/>
           <a:lstStyle/>
           <a:p>
-            <a:r>
-              <a:rPr lang="en-US" dirty="0"/>
-              <a:t>Venkat: 30 seconds, same as KK. Frame the credibility that matters for this room — you build the agentic systems the class is about to attack, so the failure modes in Day 2 are ones you have hit in production.</a:t>
-            </a:r>
             <a:endParaRPr lang="en-US" dirty="0"/>
           </a:p>
         </p:txBody>
@@ -1390,10 +1131,6 @@
           <a:bodyPr/>
           <a:lstStyle/>
           <a:p>
-            <a:r>
-              <a:rPr lang="en-US" dirty="0"/>
-              <a:t>These four set expectations that prevent 80% of the is-it-broken moments. The patience point especially — name it before the first slow response, not after. The sanctioned-payload point saves people from concluding they failed when they actually out-attacked the grader.</a:t>
-            </a:r>
             <a:endParaRPr lang="en-US" dirty="0"/>
           </a:p>
         </p:txBody>
@@ -1467,6 +1204,11 @@
 <file path=ppt/slideMasters/slideMaster1.xml><?xml version="1.0" encoding="utf-8"?>
 <p:sldMaster xmlns:a="http://schemas.openxmlformats.org/drawingml/2006/main" xmlns:r="http://schemas.openxmlformats.org/officeDocument/2006/relationships" xmlns:p="http://schemas.openxmlformats.org/presentationml/2006/main">
   <p:cSld>
+    <p:bg>
+      <p:bgRef idx="1001">
+        <a:schemeClr val="bg1"/>
+      </p:bgRef>
+    </p:bg>
     <p:spTree>
       <p:nvGrpSpPr>
         <p:cNvPr id="1" name=""/>
@@ -1749,6 +1491,7 @@
         <a:solidFill>
           <a:srgbClr val="000000"/>
         </a:solidFill>
+        <a:effectLst/>
       </p:bgPr>
     </p:bg>
     <p:spTree>
@@ -1806,17 +1549,24 @@
           </a:gradFill>
           <a:ln/>
         </p:spPr>
+        <p:txBody>
+          <a:bodyPr/>
+          <a:lstStyle/>
+          <a:p>
+            <a:endParaRPr lang="en-US"/>
+          </a:p>
+        </p:txBody>
       </p:sp>
       <p:pic>
         <p:nvPicPr>
-          <p:cNvPr id="3" name="Image 0" descr="preencoded.png">    </p:cNvPr>
+          <p:cNvPr id="3" name="Image 0" descr="preencoded.png"/>
           <p:cNvPicPr>
             <a:picLocks noChangeAspect="1"/>
           </p:cNvPicPr>
           <p:nvPr/>
         </p:nvPicPr>
         <p:blipFill>
-          <a:blip r:embed="rId1"/>
+          <a:blip r:embed="rId3"/>
           <a:stretch>
             <a:fillRect/>
           </a:stretch>
@@ -1854,11 +1604,11 @@
           </a:bodyPr>
           <a:lstStyle/>
           <a:p>
-            <a:pPr algn="l" indent="0" marL="0">
-              <a:buNone/>
-            </a:pPr>
-            <a:r>
-              <a:rPr lang="en-US" sz="1650" spc="495" kern="0" dirty="0">
+            <a:pPr marL="0" indent="0" algn="l">
+              <a:buNone/>
+            </a:pPr>
+            <a:r>
+              <a:rPr lang="en-US" sz="1650" kern="0" spc="495" dirty="0">
                 <a:solidFill>
                   <a:srgbClr val="36CDFF"/>
                 </a:solidFill>
@@ -1895,14 +1645,14 @@
           </a:bodyPr>
           <a:lstStyle/>
           <a:p>
-            <a:pPr algn="l" indent="0" marL="0">
+            <a:pPr marL="0" indent="0" algn="l">
               <a:lnSpc>
                 <a:spcPct val="71965"/>
               </a:lnSpc>
               <a:buNone/>
             </a:pPr>
             <a:r>
-              <a:rPr lang="en-US" sz="11250" b="1" spc="113" kern="0" dirty="0">
+              <a:rPr lang="en-US" sz="11250" b="1" kern="0" spc="113" dirty="0">
                 <a:solidFill>
                   <a:srgbClr val="FFFFFF"/>
                 </a:solidFill>
@@ -1912,14 +1662,8 @@
               </a:rPr>
               <a:t>ADVERSARIAL </a:t>
             </a:r>
-            <a:pPr algn="l" indent="0" marL="0">
-              <a:lnSpc>
-                <a:spcPct val="71965"/>
-              </a:lnSpc>
-              <a:buNone/>
-            </a:pPr>
-            <a:r>
-              <a:rPr lang="en-US" sz="11250" b="1" spc="113" kern="0" dirty="0">
+            <a:r>
+              <a:rPr lang="en-US" sz="11250" b="1" kern="0" spc="113" dirty="0">
                 <a:solidFill>
                   <a:srgbClr val="FD7EF5"/>
                 </a:solidFill>
@@ -1956,7 +1700,7 @@
           </a:bodyPr>
           <a:lstStyle/>
           <a:p>
-            <a:pPr algn="l" indent="0" marL="0">
+            <a:pPr marL="0" indent="0" algn="l">
               <a:lnSpc>
                 <a:spcPct val="121739"/>
               </a:lnSpc>
@@ -1979,14 +1723,14 @@
       </p:sp>
       <p:pic>
         <p:nvPicPr>
-          <p:cNvPr id="7" name="Image 1" descr="preencoded.png">    </p:cNvPr>
+          <p:cNvPr id="7" name="Image 1" descr="preencoded.png"/>
           <p:cNvPicPr>
             <a:picLocks noChangeAspect="1"/>
           </p:cNvPicPr>
           <p:nvPr/>
         </p:nvPicPr>
         <p:blipFill>
-          <a:blip r:embed="rId2"/>
+          <a:blip r:embed="rId4"/>
           <a:stretch>
             <a:fillRect/>
           </a:stretch>
@@ -2024,14 +1768,14 @@
           </a:bodyPr>
           <a:lstStyle/>
           <a:p>
-            <a:pPr algn="r" indent="0" marL="0">
+            <a:pPr marL="0" indent="0" algn="r">
               <a:lnSpc>
                 <a:spcPct val="152105"/>
               </a:lnSpc>
               <a:buNone/>
             </a:pPr>
             <a:r>
-              <a:rPr lang="en-US" sz="1275" spc="179" kern="0" dirty="0">
+              <a:rPr lang="en-US" sz="1275" kern="0" spc="179" dirty="0">
                 <a:solidFill>
                   <a:srgbClr val="FFFFFF"/>
                 </a:solidFill>
@@ -2068,14 +1812,14 @@
           </a:bodyPr>
           <a:lstStyle/>
           <a:p>
-            <a:pPr algn="r" indent="0" marL="0">
+            <a:pPr marL="0" indent="0" algn="r">
               <a:lnSpc>
                 <a:spcPct val="152105"/>
               </a:lnSpc>
               <a:buNone/>
             </a:pPr>
             <a:r>
-              <a:rPr lang="en-US" sz="1275" spc="179" kern="0" dirty="0">
+              <a:rPr lang="en-US" sz="1275" kern="0" spc="179" dirty="0">
                 <a:solidFill>
                   <a:srgbClr val="969696"/>
                 </a:solidFill>
@@ -2105,6 +1849,7 @@
         <a:solidFill>
           <a:srgbClr val="000000"/>
         </a:solidFill>
+        <a:effectLst/>
       </p:bgPr>
     </p:bg>
     <p:spTree>
@@ -2144,11 +1889,11 @@
           </a:bodyPr>
           <a:lstStyle/>
           <a:p>
-            <a:pPr algn="l" indent="0" marL="0">
-              <a:buNone/>
-            </a:pPr>
-            <a:r>
-              <a:rPr lang="en-US" sz="1500" spc="450" kern="0" dirty="0">
+            <a:pPr marL="0" indent="0" algn="l">
+              <a:buNone/>
+            </a:pPr>
+            <a:r>
+              <a:rPr lang="en-US" sz="1500" kern="0" spc="450" dirty="0">
                 <a:solidFill>
                   <a:srgbClr val="36CDFF"/>
                 </a:solidFill>
@@ -2181,11 +1926,11 @@
         </p:spPr>
         <p:txBody>
           <a:bodyPr wrap="square" lIns="25400" tIns="25400" rIns="25400" bIns="25400" rtlCol="0" anchor="t">
-            <a:normAutofit/>
-          </a:bodyPr>
-          <a:lstStyle/>
-          <a:p>
-            <a:pPr algn="l" indent="0" marL="0">
+            <a:normAutofit lnSpcReduction="10000"/>
+          </a:bodyPr>
+          <a:lstStyle/>
+          <a:p>
+            <a:pPr marL="0" indent="0" algn="l">
               <a:lnSpc>
                 <a:spcPct val="78190"/>
               </a:lnSpc>
@@ -2225,11 +1970,11 @@
         </p:spPr>
         <p:txBody>
           <a:bodyPr wrap="square" lIns="25400" tIns="25400" rIns="25400" bIns="25400" rtlCol="0" anchor="t">
-            <a:normAutofit/>
-          </a:bodyPr>
-          <a:lstStyle/>
-          <a:p>
-            <a:pPr algn="l" indent="0" marL="0">
+            <a:normAutofit lnSpcReduction="10000"/>
+          </a:bodyPr>
+          <a:lstStyle/>
+          <a:p>
+            <a:pPr marL="0" indent="0" algn="l">
               <a:lnSpc>
                 <a:spcPct val="132000"/>
               </a:lnSpc>
@@ -2273,7 +2018,7 @@
           </a:bodyPr>
           <a:lstStyle/>
           <a:p>
-            <a:pPr algn="l" indent="0" marL="0">
+            <a:pPr marL="0" indent="0" algn="l">
               <a:lnSpc>
                 <a:spcPct val="121194"/>
               </a:lnSpc>
@@ -2290,13 +2035,117 @@
               </a:rPr>
               <a:t>Everything here is a </a:t>
             </a:r>
-            <a:pPr algn="l" indent="0" marL="0">
+            <a:r>
+              <a:rPr lang="en-US" sz="2175" b="1" dirty="0">
+                <a:solidFill>
+                  <a:srgbClr val="FFFFFF"/>
+                </a:solidFill>
+                <a:latin typeface="Arial" pitchFamily="34" charset="0"/>
+                <a:ea typeface="Arial" pitchFamily="34" charset="-122"/>
+                <a:cs typeface="Arial" pitchFamily="34" charset="-120"/>
+              </a:rPr>
+              <a:t>deliberately-vulnerable teaching lab</a:t>
+            </a:r>
+            <a:r>
+              <a:rPr lang="en-US" sz="2175" dirty="0">
+                <a:solidFill>
+                  <a:srgbClr val="FFFFFF"/>
+                </a:solidFill>
+                <a:latin typeface="Arial" pitchFamily="34" charset="0"/>
+                <a:ea typeface="Arial" pitchFamily="34" charset="-122"/>
+                <a:cs typeface="Arial" pitchFamily="34" charset="-120"/>
+              </a:rPr>
+              <a:t>. </a:t>
+            </a:r>
+            <a:endParaRPr lang="en-US" sz="2175" dirty="0"/>
+          </a:p>
+        </p:txBody>
+      </p:sp>
+      <p:sp>
+        <p:nvSpPr>
+          <p:cNvPr id="6" name="Text 4"/>
+          <p:cNvSpPr/>
+          <p:nvPr/>
+        </p:nvSpPr>
+        <p:spPr>
+          <a:xfrm>
+            <a:off x="990600" y="5575475"/>
+            <a:ext cx="202406" cy="429517"/>
+          </a:xfrm>
+          <a:prstGeom prst="rect">
+            <a:avLst/>
+          </a:prstGeom>
+          <a:noFill/>
+          <a:ln/>
+        </p:spPr>
+        <p:txBody>
+          <a:bodyPr wrap="square" lIns="25400" tIns="25400" rIns="25400" bIns="25400" rtlCol="0" anchor="t">
+            <a:normAutofit/>
+          </a:bodyPr>
+          <a:lstStyle/>
+          <a:p>
+            <a:pPr marL="0" indent="0" algn="l">
+              <a:lnSpc>
+                <a:spcPct val="132000"/>
+              </a:lnSpc>
+              <a:buNone/>
+            </a:pPr>
+            <a:r>
+              <a:rPr lang="en-US" sz="1650" dirty="0">
+                <a:solidFill>
+                  <a:srgbClr val="FD7EF5"/>
+                </a:solidFill>
+                <a:latin typeface="Courier New" pitchFamily="34" charset="0"/>
+                <a:ea typeface="Courier New" pitchFamily="34" charset="-122"/>
+                <a:cs typeface="Courier New" pitchFamily="34" charset="-120"/>
+              </a:rPr>
+              <a:t>▸</a:t>
+            </a:r>
+            <a:endParaRPr lang="en-US" sz="1650" dirty="0"/>
+          </a:p>
+        </p:txBody>
+      </p:sp>
+      <p:sp>
+        <p:nvSpPr>
+          <p:cNvPr id="7" name="Text 5"/>
+          <p:cNvSpPr/>
+          <p:nvPr/>
+        </p:nvSpPr>
+        <p:spPr>
+          <a:xfrm>
+            <a:off x="1307306" y="5526198"/>
+            <a:ext cx="9130323" cy="429518"/>
+          </a:xfrm>
+          <a:prstGeom prst="rect">
+            <a:avLst/>
+          </a:prstGeom>
+          <a:noFill/>
+          <a:ln/>
+        </p:spPr>
+        <p:txBody>
+          <a:bodyPr wrap="square" lIns="25400" tIns="25400" rIns="25400" bIns="25400" rtlCol="0" anchor="t">
+            <a:normAutofit/>
+          </a:bodyPr>
+          <a:lstStyle/>
+          <a:p>
+            <a:pPr marL="0" indent="0" algn="l">
               <a:lnSpc>
                 <a:spcPct val="121194"/>
               </a:lnSpc>
               <a:buNone/>
             </a:pPr>
             <a:r>
+              <a:rPr lang="en-US" sz="2175" dirty="0">
+                <a:solidFill>
+                  <a:srgbClr val="FFFFFF"/>
+                </a:solidFill>
+                <a:latin typeface="Arial" pitchFamily="34" charset="0"/>
+                <a:ea typeface="Arial" pitchFamily="34" charset="-122"/>
+                <a:cs typeface="Arial" pitchFamily="34" charset="-120"/>
+              </a:rPr>
+              <a:t>Work at your own pace; instructors circulate — </a:t>
+            </a:r>
+            <a:r>
               <a:rPr lang="en-US" sz="2175" b="1" dirty="0">
                 <a:solidFill>
                   <a:srgbClr val="FFFFFF"/>
@@ -2305,9 +2154,91 @@
                 <a:ea typeface="Arial" pitchFamily="34" charset="-122"/>
                 <a:cs typeface="Arial" pitchFamily="34" charset="-120"/>
               </a:rPr>
-              <a:t>deliberately-vulnerable teaching lab</a:t>
-            </a:r>
-            <a:pPr algn="l" indent="0" marL="0">
+              <a:t>raise a hand </a:t>
+            </a:r>
+            <a:r>
+              <a:rPr lang="en-US" sz="2175" dirty="0">
+                <a:solidFill>
+                  <a:srgbClr val="FFFFFF"/>
+                </a:solidFill>
+                <a:latin typeface="Arial" pitchFamily="34" charset="0"/>
+                <a:ea typeface="Arial" pitchFamily="34" charset="-122"/>
+                <a:cs typeface="Arial" pitchFamily="34" charset="-120"/>
+              </a:rPr>
+              <a:t>anytime.</a:t>
+            </a:r>
+            <a:endParaRPr lang="en-US" sz="2175" dirty="0"/>
+          </a:p>
+        </p:txBody>
+      </p:sp>
+      <p:sp>
+        <p:nvSpPr>
+          <p:cNvPr id="8" name="Text 6"/>
+          <p:cNvSpPr/>
+          <p:nvPr/>
+        </p:nvSpPr>
+        <p:spPr>
+          <a:xfrm>
+            <a:off x="990600" y="6291635"/>
+            <a:ext cx="202406" cy="352425"/>
+          </a:xfrm>
+          <a:prstGeom prst="rect">
+            <a:avLst/>
+          </a:prstGeom>
+          <a:noFill/>
+          <a:ln/>
+        </p:spPr>
+        <p:txBody>
+          <a:bodyPr wrap="square" lIns="25400" tIns="25400" rIns="25400" bIns="25400" rtlCol="0" anchor="t">
+            <a:normAutofit lnSpcReduction="10000"/>
+          </a:bodyPr>
+          <a:lstStyle/>
+          <a:p>
+            <a:pPr marL="0" indent="0" algn="l">
+              <a:lnSpc>
+                <a:spcPct val="132000"/>
+              </a:lnSpc>
+              <a:buNone/>
+            </a:pPr>
+            <a:r>
+              <a:rPr lang="en-US" sz="1650" dirty="0">
+                <a:solidFill>
+                  <a:srgbClr val="FD7EF5"/>
+                </a:solidFill>
+                <a:latin typeface="Courier New" pitchFamily="34" charset="0"/>
+                <a:ea typeface="Courier New" pitchFamily="34" charset="-122"/>
+                <a:cs typeface="Courier New" pitchFamily="34" charset="-120"/>
+              </a:rPr>
+              <a:t>▸</a:t>
+            </a:r>
+            <a:endParaRPr lang="en-US" sz="1650" dirty="0"/>
+          </a:p>
+        </p:txBody>
+      </p:sp>
+      <p:sp>
+        <p:nvSpPr>
+          <p:cNvPr id="9" name="Text 7"/>
+          <p:cNvSpPr/>
+          <p:nvPr/>
+        </p:nvSpPr>
+        <p:spPr>
+          <a:xfrm>
+            <a:off x="1307306" y="6291635"/>
+            <a:ext cx="10926641" cy="424755"/>
+          </a:xfrm>
+          <a:prstGeom prst="rect">
+            <a:avLst/>
+          </a:prstGeom>
+          <a:noFill/>
+          <a:ln/>
+        </p:spPr>
+        <p:txBody>
+          <a:bodyPr wrap="square" lIns="25400" tIns="25400" rIns="25400" bIns="25400" rtlCol="0" anchor="t">
+            <a:normAutofit/>
+          </a:bodyPr>
+          <a:lstStyle/>
+          <a:p>
+            <a:pPr marL="0" indent="0" algn="l">
               <a:lnSpc>
                 <a:spcPct val="121194"/>
               </a:lnSpc>
@@ -2322,250 +2253,6 @@
                 <a:ea typeface="Arial" pitchFamily="34" charset="-122"/>
                 <a:cs typeface="Arial" pitchFamily="34" charset="-120"/>
               </a:rPr>
-              <a:t>. These techniques are for </a:t>
-            </a:r>
-            <a:pPr algn="l" indent="0" marL="0">
-              <a:lnSpc>
-                <a:spcPct val="121194"/>
-              </a:lnSpc>
-              <a:buNone/>
-            </a:pPr>
-            <a:r>
-              <a:rPr lang="en-US" sz="2175" b="1" dirty="0">
-                <a:solidFill>
-                  <a:srgbClr val="FFFFFF"/>
-                </a:solidFill>
-                <a:latin typeface="Arial" pitchFamily="34" charset="0"/>
-                <a:ea typeface="Arial" pitchFamily="34" charset="-122"/>
-                <a:cs typeface="Arial" pitchFamily="34" charset="-120"/>
-              </a:rPr>
-              <a:t>authorized testing only </a:t>
-            </a:r>
-            <a:pPr algn="l" indent="0" marL="0">
-              <a:lnSpc>
-                <a:spcPct val="121194"/>
-              </a:lnSpc>
-              <a:buNone/>
-            </a:pPr>
-            <a:r>
-              <a:rPr lang="en-US" sz="2175" dirty="0">
-                <a:solidFill>
-                  <a:srgbClr val="FFFFFF"/>
-                </a:solidFill>
-                <a:latin typeface="Arial" pitchFamily="34" charset="0"/>
-                <a:ea typeface="Arial" pitchFamily="34" charset="-122"/>
-                <a:cs typeface="Arial" pitchFamily="34" charset="-120"/>
-              </a:rPr>
-              <a:t>— the skills are real, the consent is what makes them legal.</a:t>
-            </a:r>
-            <a:endParaRPr lang="en-US" sz="2175" dirty="0"/>
-          </a:p>
-        </p:txBody>
-      </p:sp>
-      <p:sp>
-        <p:nvSpPr>
-          <p:cNvPr id="6" name="Text 4"/>
-          <p:cNvSpPr/>
-          <p:nvPr/>
-        </p:nvSpPr>
-        <p:spPr>
-          <a:xfrm>
-            <a:off x="990600" y="5652567"/>
-            <a:ext cx="202406" cy="352425"/>
-          </a:xfrm>
-          <a:prstGeom prst="rect">
-            <a:avLst/>
-          </a:prstGeom>
-          <a:noFill/>
-          <a:ln/>
-        </p:spPr>
-        <p:txBody>
-          <a:bodyPr wrap="square" lIns="25400" tIns="25400" rIns="25400" bIns="25400" rtlCol="0" anchor="t">
-            <a:normAutofit/>
-          </a:bodyPr>
-          <a:lstStyle/>
-          <a:p>
-            <a:pPr algn="l" indent="0" marL="0">
-              <a:lnSpc>
-                <a:spcPct val="132000"/>
-              </a:lnSpc>
-              <a:buNone/>
-            </a:pPr>
-            <a:r>
-              <a:rPr lang="en-US" sz="1650" dirty="0">
-                <a:solidFill>
-                  <a:srgbClr val="FD7EF5"/>
-                </a:solidFill>
-                <a:latin typeface="Courier New" pitchFamily="34" charset="0"/>
-                <a:ea typeface="Courier New" pitchFamily="34" charset="-122"/>
-                <a:cs typeface="Courier New" pitchFamily="34" charset="-120"/>
-              </a:rPr>
-              <a:t>▸</a:t>
-            </a:r>
-            <a:endParaRPr lang="en-US" sz="1650" dirty="0"/>
-          </a:p>
-        </p:txBody>
-      </p:sp>
-      <p:sp>
-        <p:nvSpPr>
-          <p:cNvPr id="7" name="Text 5"/>
-          <p:cNvSpPr/>
-          <p:nvPr/>
-        </p:nvSpPr>
-        <p:spPr>
-          <a:xfrm>
-            <a:off x="1307306" y="5652567"/>
-            <a:ext cx="9130323" cy="429518"/>
-          </a:xfrm>
-          <a:prstGeom prst="rect">
-            <a:avLst/>
-          </a:prstGeom>
-          <a:noFill/>
-          <a:ln/>
-        </p:spPr>
-        <p:txBody>
-          <a:bodyPr wrap="square" lIns="25400" tIns="25400" rIns="25400" bIns="25400" rtlCol="0" anchor="t">
-            <a:normAutofit/>
-          </a:bodyPr>
-          <a:lstStyle/>
-          <a:p>
-            <a:pPr algn="l" indent="0" marL="0">
-              <a:lnSpc>
-                <a:spcPct val="121194"/>
-              </a:lnSpc>
-              <a:buNone/>
-            </a:pPr>
-            <a:r>
-              <a:rPr lang="en-US" sz="2175" dirty="0">
-                <a:solidFill>
-                  <a:srgbClr val="FFFFFF"/>
-                </a:solidFill>
-                <a:latin typeface="Arial" pitchFamily="34" charset="0"/>
-                <a:ea typeface="Arial" pitchFamily="34" charset="-122"/>
-                <a:cs typeface="Arial" pitchFamily="34" charset="-120"/>
-              </a:rPr>
-              <a:t>Work at your own pace; instructors circulate — </a:t>
-            </a:r>
-            <a:pPr algn="l" indent="0" marL="0">
-              <a:lnSpc>
-                <a:spcPct val="121194"/>
-              </a:lnSpc>
-              <a:buNone/>
-            </a:pPr>
-            <a:r>
-              <a:rPr lang="en-US" sz="2175" b="1" dirty="0">
-                <a:solidFill>
-                  <a:srgbClr val="FFFFFF"/>
-                </a:solidFill>
-                <a:latin typeface="Arial" pitchFamily="34" charset="0"/>
-                <a:ea typeface="Arial" pitchFamily="34" charset="-122"/>
-                <a:cs typeface="Arial" pitchFamily="34" charset="-120"/>
-              </a:rPr>
-              <a:t>raise a hand </a:t>
-            </a:r>
-            <a:pPr algn="l" indent="0" marL="0">
-              <a:lnSpc>
-                <a:spcPct val="121194"/>
-              </a:lnSpc>
-              <a:buNone/>
-            </a:pPr>
-            <a:r>
-              <a:rPr lang="en-US" sz="2175" dirty="0">
-                <a:solidFill>
-                  <a:srgbClr val="FFFFFF"/>
-                </a:solidFill>
-                <a:latin typeface="Arial" pitchFamily="34" charset="0"/>
-                <a:ea typeface="Arial" pitchFamily="34" charset="-122"/>
-                <a:cs typeface="Arial" pitchFamily="34" charset="-120"/>
-              </a:rPr>
-              <a:t>anytime.</a:t>
-            </a:r>
-            <a:endParaRPr lang="en-US" sz="2175" dirty="0"/>
-          </a:p>
-        </p:txBody>
-      </p:sp>
-      <p:sp>
-        <p:nvSpPr>
-          <p:cNvPr id="8" name="Text 6"/>
-          <p:cNvSpPr/>
-          <p:nvPr/>
-        </p:nvSpPr>
-        <p:spPr>
-          <a:xfrm>
-            <a:off x="990600" y="6291635"/>
-            <a:ext cx="202406" cy="352425"/>
-          </a:xfrm>
-          <a:prstGeom prst="rect">
-            <a:avLst/>
-          </a:prstGeom>
-          <a:noFill/>
-          <a:ln/>
-        </p:spPr>
-        <p:txBody>
-          <a:bodyPr wrap="square" lIns="25400" tIns="25400" rIns="25400" bIns="25400" rtlCol="0" anchor="t">
-            <a:normAutofit/>
-          </a:bodyPr>
-          <a:lstStyle/>
-          <a:p>
-            <a:pPr algn="l" indent="0" marL="0">
-              <a:lnSpc>
-                <a:spcPct val="132000"/>
-              </a:lnSpc>
-              <a:buNone/>
-            </a:pPr>
-            <a:r>
-              <a:rPr lang="en-US" sz="1650" dirty="0">
-                <a:solidFill>
-                  <a:srgbClr val="FD7EF5"/>
-                </a:solidFill>
-                <a:latin typeface="Courier New" pitchFamily="34" charset="0"/>
-                <a:ea typeface="Courier New" pitchFamily="34" charset="-122"/>
-                <a:cs typeface="Courier New" pitchFamily="34" charset="-120"/>
-              </a:rPr>
-              <a:t>▸</a:t>
-            </a:r>
-            <a:endParaRPr lang="en-US" sz="1650" dirty="0"/>
-          </a:p>
-        </p:txBody>
-      </p:sp>
-      <p:sp>
-        <p:nvSpPr>
-          <p:cNvPr id="9" name="Text 7"/>
-          <p:cNvSpPr/>
-          <p:nvPr/>
-        </p:nvSpPr>
-        <p:spPr>
-          <a:xfrm>
-            <a:off x="1307306" y="6291635"/>
-            <a:ext cx="10926641" cy="424755"/>
-          </a:xfrm>
-          <a:prstGeom prst="rect">
-            <a:avLst/>
-          </a:prstGeom>
-          <a:noFill/>
-          <a:ln/>
-        </p:spPr>
-        <p:txBody>
-          <a:bodyPr wrap="square" lIns="25400" tIns="25400" rIns="25400" bIns="25400" rtlCol="0" anchor="t">
-            <a:normAutofit/>
-          </a:bodyPr>
-          <a:lstStyle/>
-          <a:p>
-            <a:pPr algn="l" indent="0" marL="0">
-              <a:lnSpc>
-                <a:spcPct val="121194"/>
-              </a:lnSpc>
-              <a:buNone/>
-            </a:pPr>
-            <a:r>
-              <a:rPr lang="en-US" sz="2175" dirty="0">
-                <a:solidFill>
-                  <a:srgbClr val="FFFFFF"/>
-                </a:solidFill>
-                <a:latin typeface="Arial" pitchFamily="34" charset="0"/>
-                <a:ea typeface="Arial" pitchFamily="34" charset="-122"/>
-                <a:cs typeface="Arial" pitchFamily="34" charset="-120"/>
-              </a:rPr>
               <a:t>Stuck on reach or a slow response? Flag it early; we fix it while the room warms up.</a:t>
             </a:r>
             <a:endParaRPr lang="en-US" sz="2175" dirty="0"/>
@@ -2574,14 +2261,14 @@
       </p:sp>
       <p:pic>
         <p:nvPicPr>
-          <p:cNvPr id="10" name="Image 0" descr="preencoded.png">    </p:cNvPr>
+          <p:cNvPr id="10" name="Image 0" descr="preencoded.png"/>
           <p:cNvPicPr>
             <a:picLocks noChangeAspect="1"/>
           </p:cNvPicPr>
           <p:nvPr/>
         </p:nvPicPr>
         <p:blipFill>
-          <a:blip r:embed="rId1"/>
+          <a:blip r:embed="rId3"/>
           <a:stretch>
             <a:fillRect/>
           </a:stretch>
@@ -2619,11 +2306,11 @@
           </a:bodyPr>
           <a:lstStyle/>
           <a:p>
-            <a:pPr algn="l" indent="0" marL="0">
-              <a:buNone/>
-            </a:pPr>
-            <a:r>
-              <a:rPr lang="en-US" sz="1200" spc="264" kern="0" dirty="0">
+            <a:pPr marL="0" indent="0" algn="l">
+              <a:buNone/>
+            </a:pPr>
+            <a:r>
+              <a:rPr lang="en-US" sz="1200" kern="0" spc="264" dirty="0">
                 <a:solidFill>
                   <a:srgbClr val="969696"/>
                 </a:solidFill>
@@ -2653,6 +2340,7 @@
         <a:solidFill>
           <a:srgbClr val="000000"/>
         </a:solidFill>
+        <a:effectLst/>
       </p:bgPr>
     </p:bg>
     <p:spTree>
@@ -2692,11 +2380,11 @@
           </a:bodyPr>
           <a:lstStyle/>
           <a:p>
-            <a:pPr algn="l" indent="0" marL="0">
-              <a:buNone/>
-            </a:pPr>
-            <a:r>
-              <a:rPr lang="en-US" sz="1650" spc="495" kern="0" dirty="0">
+            <a:pPr marL="0" indent="0" algn="l">
+              <a:buNone/>
+            </a:pPr>
+            <a:r>
+              <a:rPr lang="en-US" sz="1650" kern="0" spc="495" dirty="0">
                 <a:solidFill>
                   <a:srgbClr val="36CDFF"/>
                 </a:solidFill>
@@ -2733,7 +2421,7 @@
           </a:bodyPr>
           <a:lstStyle/>
           <a:p>
-            <a:pPr algn="l" indent="0" marL="0">
+            <a:pPr marL="0" indent="0" algn="l">
               <a:lnSpc>
                 <a:spcPct val="69565"/>
               </a:lnSpc>
@@ -2750,12 +2438,6 @@
               </a:rPr>
               <a:t>RANGE</a:t>
             </a:r>
-            <a:pPr algn="l" indent="0" marL="0">
-              <a:lnSpc>
-                <a:spcPct val="69565"/>
-              </a:lnSpc>
-              <a:buNone/>
-            </a:pPr>
             <a:r>
               <a:rPr lang="en-US" sz="19500" b="1" dirty="0">
                 <a:solidFill>
@@ -2794,7 +2476,7 @@
           </a:bodyPr>
           <a:lstStyle/>
           <a:p>
-            <a:pPr algn="l" indent="0" marL="0">
+            <a:pPr marL="0" indent="0" algn="l">
               <a:lnSpc>
                 <a:spcPct val="126410"/>
               </a:lnSpc>
@@ -2817,14 +2499,14 @@
       </p:sp>
       <p:pic>
         <p:nvPicPr>
-          <p:cNvPr id="5" name="Image 0" descr="preencoded.png">    </p:cNvPr>
+          <p:cNvPr id="5" name="Image 0" descr="preencoded.png"/>
           <p:cNvPicPr>
             <a:picLocks noChangeAspect="1"/>
           </p:cNvPicPr>
           <p:nvPr/>
         </p:nvPicPr>
         <p:blipFill>
-          <a:blip r:embed="rId1"/>
+          <a:blip r:embed="rId3"/>
           <a:stretch>
             <a:fillRect/>
           </a:stretch>
@@ -2862,11 +2544,11 @@
           </a:bodyPr>
           <a:lstStyle/>
           <a:p>
-            <a:pPr algn="l" indent="0" marL="0">
-              <a:buNone/>
-            </a:pPr>
-            <a:r>
-              <a:rPr lang="en-US" sz="1200" spc="264" kern="0" dirty="0">
+            <a:pPr marL="0" indent="0" algn="l">
+              <a:buNone/>
+            </a:pPr>
+            <a:r>
+              <a:rPr lang="en-US" sz="1200" kern="0" spc="264" dirty="0">
                 <a:solidFill>
                   <a:srgbClr val="969696"/>
                 </a:solidFill>
@@ -2896,6 +2578,7 @@
         <a:solidFill>
           <a:srgbClr val="000000"/>
         </a:solidFill>
+        <a:effectLst/>
       </p:bgPr>
     </p:bg>
     <p:spTree>
@@ -2935,11 +2618,11 @@
           </a:bodyPr>
           <a:lstStyle/>
           <a:p>
-            <a:pPr algn="l" indent="0" marL="0">
-              <a:buNone/>
-            </a:pPr>
-            <a:r>
-              <a:rPr lang="en-US" sz="1500" spc="450" kern="0" dirty="0">
+            <a:pPr marL="0" indent="0" algn="l">
+              <a:buNone/>
+            </a:pPr>
+            <a:r>
+              <a:rPr lang="en-US" sz="1500" kern="0" spc="450" dirty="0">
                 <a:solidFill>
                   <a:srgbClr val="36CDFF"/>
                 </a:solidFill>
@@ -2976,7 +2659,7 @@
           </a:bodyPr>
           <a:lstStyle/>
           <a:p>
-            <a:pPr algn="l" indent="0" marL="0">
+            <a:pPr marL="0" indent="0" algn="l">
               <a:lnSpc>
                 <a:spcPct val="78342"/>
               </a:lnSpc>
@@ -3020,7 +2703,7 @@
           </a:bodyPr>
           <a:lstStyle/>
           <a:p>
-            <a:pPr algn="l" indent="0" marL="0">
+            <a:pPr marL="0" indent="0" algn="l">
               <a:lnSpc>
                 <a:spcPct val="125522"/>
               </a:lnSpc>
@@ -3037,12 +2720,6 @@
               </a:rPr>
               <a:t>You attack </a:t>
             </a:r>
-            <a:pPr algn="l" indent="0" marL="0">
-              <a:lnSpc>
-                <a:spcPct val="125522"/>
-              </a:lnSpc>
-              <a:buNone/>
-            </a:pPr>
             <a:r>
               <a:rPr lang="en-US" sz="2175" b="1" dirty="0">
                 <a:solidFill>
@@ -3054,12 +2731,6 @@
               </a:rPr>
               <a:t>one </a:t>
             </a:r>
-            <a:pPr algn="l" indent="0" marL="0">
-              <a:lnSpc>
-                <a:spcPct val="125522"/>
-              </a:lnSpc>
-              <a:buNone/>
-            </a:pPr>
             <a:r>
               <a:rPr lang="en-US" sz="2175" dirty="0">
                 <a:solidFill>
@@ -3071,12 +2742,6 @@
               </a:rPr>
               <a:t>fictional AI-first neobank — </a:t>
             </a:r>
-            <a:pPr algn="l" indent="0" marL="0">
-              <a:lnSpc>
-                <a:spcPct val="125522"/>
-              </a:lnSpc>
-              <a:buNone/>
-            </a:pPr>
             <a:r>
               <a:rPr lang="en-US" sz="2175" b="1" dirty="0">
                 <a:solidFill>
@@ -3088,12 +2753,6 @@
               </a:rPr>
               <a:t>Eiger </a:t>
             </a:r>
-            <a:pPr algn="l" indent="0" marL="0">
-              <a:lnSpc>
-                <a:spcPct val="125522"/>
-              </a:lnSpc>
-              <a:buNone/>
-            </a:pPr>
             <a:r>
               <a:rPr lang="en-US" sz="2175" dirty="0">
                 <a:solidFill>
@@ -3105,12 +2764,6 @@
               </a:rPr>
               <a:t>— and its assistant </a:t>
             </a:r>
-            <a:pPr algn="l" indent="0" marL="0">
-              <a:lnSpc>
-                <a:spcPct val="125522"/>
-              </a:lnSpc>
-              <a:buNone/>
-            </a:pPr>
             <a:r>
               <a:rPr lang="en-US" sz="2175" b="1" dirty="0">
                 <a:solidFill>
@@ -3122,12 +2775,6 @@
               </a:rPr>
               <a:t>Iggy</a:t>
             </a:r>
-            <a:pPr algn="l" indent="0" marL="0">
-              <a:lnSpc>
-                <a:spcPct val="125522"/>
-              </a:lnSpc>
-              <a:buNone/>
-            </a:pPr>
             <a:r>
               <a:rPr lang="en-US" sz="2175" dirty="0">
                 <a:solidFill>
@@ -3139,12 +2786,6 @@
               </a:rPr>
               <a:t>. Its attack surface </a:t>
             </a:r>
-            <a:pPr algn="l" indent="0" marL="0">
-              <a:lnSpc>
-                <a:spcPct val="125522"/>
-              </a:lnSpc>
-              <a:buNone/>
-            </a:pPr>
             <a:r>
               <a:rPr lang="en-US" sz="2175" b="1" dirty="0">
                 <a:solidFill>
@@ -3156,12 +2797,6 @@
               </a:rPr>
               <a:t>grows each module</a:t>
             </a:r>
-            <a:pPr algn="l" indent="0" marL="0">
-              <a:lnSpc>
-                <a:spcPct val="125522"/>
-              </a:lnSpc>
-              <a:buNone/>
-            </a:pPr>
             <a:r>
               <a:rPr lang="en-US" sz="2175" dirty="0">
                 <a:solidFill>
@@ -3205,6 +2840,13 @@
             <a:prstDash val="solid"/>
           </a:ln>
         </p:spPr>
+        <p:txBody>
+          <a:bodyPr/>
+          <a:lstStyle/>
+          <a:p>
+            <a:endParaRPr lang="en-US"/>
+          </a:p>
+        </p:txBody>
       </p:sp>
       <p:sp>
         <p:nvSpPr>
@@ -3227,6 +2869,13 @@
           </a:solidFill>
           <a:ln/>
         </p:spPr>
+        <p:txBody>
+          <a:bodyPr/>
+          <a:lstStyle/>
+          <a:p>
+            <a:endParaRPr lang="en-US"/>
+          </a:p>
+        </p:txBody>
       </p:sp>
       <p:sp>
         <p:nvSpPr>
@@ -3247,6 +2896,13 @@
           </a:solidFill>
           <a:ln/>
         </p:spPr>
+        <p:txBody>
+          <a:bodyPr/>
+          <a:lstStyle/>
+          <a:p>
+            <a:endParaRPr lang="en-US"/>
+          </a:p>
+        </p:txBody>
       </p:sp>
       <p:sp>
         <p:nvSpPr>
@@ -3267,6 +2923,13 @@
           </a:solidFill>
           <a:ln/>
         </p:spPr>
+        <p:txBody>
+          <a:bodyPr/>
+          <a:lstStyle/>
+          <a:p>
+            <a:endParaRPr lang="en-US"/>
+          </a:p>
+        </p:txBody>
       </p:sp>
       <p:sp>
         <p:nvSpPr>
@@ -3287,6 +2950,13 @@
           </a:solidFill>
           <a:ln/>
         </p:spPr>
+        <p:txBody>
+          <a:bodyPr/>
+          <a:lstStyle/>
+          <a:p>
+            <a:endParaRPr lang="en-US"/>
+          </a:p>
+        </p:txBody>
       </p:sp>
       <p:sp>
         <p:nvSpPr>
@@ -3311,7 +2981,7 @@
           </a:bodyPr>
           <a:lstStyle/>
           <a:p>
-            <a:pPr algn="l" indent="0" marL="0">
+            <a:pPr marL="0" indent="0" algn="l">
               <a:buNone/>
             </a:pPr>
             <a:r>
@@ -3352,7 +3022,7 @@
           </a:bodyPr>
           <a:lstStyle/>
           <a:p>
-            <a:pPr algn="l" indent="0" marL="0">
+            <a:pPr marL="0" indent="0" algn="l">
               <a:lnSpc>
                 <a:spcPct val="145424"/>
               </a:lnSpc>
@@ -3369,12 +3039,6 @@
               </a:rPr>
               <a:t>L0 chatbot</a:t>
             </a:r>
-            <a:pPr algn="l" indent="0" marL="0">
-              <a:lnSpc>
-                <a:spcPct val="145424"/>
-              </a:lnSpc>
-              <a:buNone/>
-            </a:pPr>
             <a:r>
               <a:rPr lang="en-US" sz="1950" dirty="0">
                 <a:solidFill>
@@ -3386,12 +3050,6 @@
               </a:rPr>
               <a:t>  →  </a:t>
             </a:r>
-            <a:pPr algn="l" indent="0" marL="0">
-              <a:lnSpc>
-                <a:spcPct val="145424"/>
-              </a:lnSpc>
-              <a:buNone/>
-            </a:pPr>
             <a:r>
               <a:rPr lang="en-US" sz="1950" dirty="0">
                 <a:solidFill>
@@ -3403,12 +3061,6 @@
               </a:rPr>
               <a:t>L1 RAG</a:t>
             </a:r>
-            <a:pPr algn="l" indent="0" marL="0">
-              <a:lnSpc>
-                <a:spcPct val="145424"/>
-              </a:lnSpc>
-              <a:buNone/>
-            </a:pPr>
             <a:r>
               <a:rPr lang="en-US" sz="1950" dirty="0">
                 <a:solidFill>
@@ -3420,12 +3072,6 @@
               </a:rPr>
               <a:t>  →  </a:t>
             </a:r>
-            <a:pPr algn="l" indent="0" marL="0">
-              <a:lnSpc>
-                <a:spcPct val="145424"/>
-              </a:lnSpc>
-              <a:buNone/>
-            </a:pPr>
             <a:r>
               <a:rPr lang="en-US" sz="1950" dirty="0">
                 <a:solidFill>
@@ -3437,12 +3083,6 @@
               </a:rPr>
               <a:t>L2 agent</a:t>
             </a:r>
-            <a:pPr algn="l" indent="0" marL="0">
-              <a:lnSpc>
-                <a:spcPct val="145424"/>
-              </a:lnSpc>
-              <a:buNone/>
-            </a:pPr>
             <a:r>
               <a:rPr lang="en-US" sz="1950" dirty="0">
                 <a:solidFill>
@@ -3454,12 +3094,6 @@
               </a:rPr>
               <a:t>  →  </a:t>
             </a:r>
-            <a:pPr algn="l" indent="0" marL="0">
-              <a:lnSpc>
-                <a:spcPct val="145424"/>
-              </a:lnSpc>
-              <a:buNone/>
-            </a:pPr>
             <a:r>
               <a:rPr lang="en-US" sz="1950" dirty="0">
                 <a:solidFill>
@@ -3471,12 +3105,6 @@
               </a:rPr>
               <a:t>L3 MCP</a:t>
             </a:r>
-            <a:pPr algn="l" indent="0" marL="0">
-              <a:lnSpc>
-                <a:spcPct val="145424"/>
-              </a:lnSpc>
-              <a:buNone/>
-            </a:pPr>
             <a:r>
               <a:rPr lang="en-US" sz="1950" dirty="0">
                 <a:solidFill>
@@ -3488,12 +3116,6 @@
               </a:rPr>
               <a:t>  →  </a:t>
             </a:r>
-            <a:pPr algn="l" indent="0" marL="0">
-              <a:lnSpc>
-                <a:spcPct val="145424"/>
-              </a:lnSpc>
-              <a:buNone/>
-            </a:pPr>
             <a:r>
               <a:rPr lang="en-US" sz="1950" dirty="0">
                 <a:solidFill>
@@ -3505,12 +3127,6 @@
               </a:rPr>
               <a:t>L4 multi-agent</a:t>
             </a:r>
-            <a:pPr algn="l" indent="0" marL="0">
-              <a:lnSpc>
-                <a:spcPct val="145424"/>
-              </a:lnSpc>
-              <a:buNone/>
-            </a:pPr>
             <a:r>
               <a:rPr lang="en-US" sz="1950" dirty="0">
                 <a:solidFill>
@@ -3522,12 +3138,6 @@
               </a:rPr>
               <a:t>  →  </a:t>
             </a:r>
-            <a:pPr algn="l" indent="0" marL="0">
-              <a:lnSpc>
-                <a:spcPct val="145424"/>
-              </a:lnSpc>
-              <a:buNone/>
-            </a:pPr>
             <a:r>
               <a:rPr lang="en-US" sz="1950" dirty="0">
                 <a:solidFill>
@@ -3566,7 +3176,7 @@
           </a:bodyPr>
           <a:lstStyle/>
           <a:p>
-            <a:pPr algn="l" indent="0" marL="0">
+            <a:pPr marL="0" indent="0" algn="l">
               <a:lnSpc>
                 <a:spcPct val="125522"/>
               </a:lnSpc>
@@ -3583,12 +3193,6 @@
               </a:rPr>
               <a:t>For every layer you </a:t>
             </a:r>
-            <a:pPr algn="l" indent="0" marL="0">
-              <a:lnSpc>
-                <a:spcPct val="125522"/>
-              </a:lnSpc>
-              <a:buNone/>
-            </a:pPr>
             <a:r>
               <a:rPr lang="en-US" sz="2175" b="1" dirty="0">
                 <a:solidFill>
@@ -3600,12 +3204,6 @@
               </a:rPr>
               <a:t>Build </a:t>
             </a:r>
-            <a:pPr algn="l" indent="0" marL="0">
-              <a:lnSpc>
-                <a:spcPct val="125522"/>
-              </a:lnSpc>
-              <a:buNone/>
-            </a:pPr>
             <a:r>
               <a:rPr lang="en-US" sz="2175" dirty="0">
                 <a:solidFill>
@@ -3617,12 +3215,6 @@
               </a:rPr>
               <a:t>it, </a:t>
             </a:r>
-            <a:pPr algn="l" indent="0" marL="0">
-              <a:lnSpc>
-                <a:spcPct val="125522"/>
-              </a:lnSpc>
-              <a:buNone/>
-            </a:pPr>
             <a:r>
               <a:rPr lang="en-US" sz="2175" b="1" dirty="0">
                 <a:solidFill>
@@ -3634,12 +3226,6 @@
               </a:rPr>
               <a:t>Break </a:t>
             </a:r>
-            <a:pPr algn="l" indent="0" marL="0">
-              <a:lnSpc>
-                <a:spcPct val="125522"/>
-              </a:lnSpc>
-              <a:buNone/>
-            </a:pPr>
             <a:r>
               <a:rPr lang="en-US" sz="2175" dirty="0">
                 <a:solidFill>
@@ -3651,12 +3237,6 @@
               </a:rPr>
               <a:t>it, then </a:t>
             </a:r>
-            <a:pPr algn="l" indent="0" marL="0">
-              <a:lnSpc>
-                <a:spcPct val="125522"/>
-              </a:lnSpc>
-              <a:buNone/>
-            </a:pPr>
             <a:r>
               <a:rPr lang="en-US" sz="2175" b="1" dirty="0">
                 <a:solidFill>
@@ -3668,12 +3248,6 @@
               </a:rPr>
               <a:t>Secure </a:t>
             </a:r>
-            <a:pPr algn="l" indent="0" marL="0">
-              <a:lnSpc>
-                <a:spcPct val="125522"/>
-              </a:lnSpc>
-              <a:buNone/>
-            </a:pPr>
             <a:r>
               <a:rPr lang="en-US" sz="2175" dirty="0">
                 <a:solidFill>
@@ -3691,14 +3265,14 @@
       </p:sp>
       <p:pic>
         <p:nvPicPr>
-          <p:cNvPr id="13" name="Image 0" descr="preencoded.png">    </p:cNvPr>
+          <p:cNvPr id="13" name="Image 0" descr="preencoded.png"/>
           <p:cNvPicPr>
             <a:picLocks noChangeAspect="1"/>
           </p:cNvPicPr>
           <p:nvPr/>
         </p:nvPicPr>
         <p:blipFill>
-          <a:blip r:embed="rId1"/>
+          <a:blip r:embed="rId3"/>
           <a:stretch>
             <a:fillRect/>
           </a:stretch>
@@ -3736,11 +3310,11 @@
           </a:bodyPr>
           <a:lstStyle/>
           <a:p>
-            <a:pPr algn="l" indent="0" marL="0">
-              <a:buNone/>
-            </a:pPr>
-            <a:r>
-              <a:rPr lang="en-US" sz="1200" spc="264" kern="0" dirty="0">
+            <a:pPr marL="0" indent="0" algn="l">
+              <a:buNone/>
+            </a:pPr>
+            <a:r>
+              <a:rPr lang="en-US" sz="1200" kern="0" spc="264" dirty="0">
                 <a:solidFill>
                   <a:srgbClr val="969696"/>
                 </a:solidFill>
@@ -3770,6 +3344,7 @@
         <a:solidFill>
           <a:srgbClr val="000000"/>
         </a:solidFill>
+        <a:effectLst/>
       </p:bgPr>
     </p:bg>
     <p:spTree>
@@ -3809,11 +3384,11 @@
           </a:bodyPr>
           <a:lstStyle/>
           <a:p>
-            <a:pPr algn="l" indent="0" marL="0">
-              <a:buNone/>
-            </a:pPr>
-            <a:r>
-              <a:rPr lang="en-US" sz="1500" spc="450" kern="0" dirty="0">
+            <a:pPr marL="0" indent="0" algn="l">
+              <a:buNone/>
+            </a:pPr>
+            <a:r>
+              <a:rPr lang="en-US" sz="1500" kern="0" spc="450" dirty="0">
                 <a:solidFill>
                   <a:srgbClr val="36CDFF"/>
                 </a:solidFill>
@@ -3850,7 +3425,7 @@
           </a:bodyPr>
           <a:lstStyle/>
           <a:p>
-            <a:pPr algn="l" indent="0" marL="0">
+            <a:pPr marL="0" indent="0" algn="l">
               <a:lnSpc>
                 <a:spcPct val="78511"/>
               </a:lnSpc>
@@ -3892,6 +3467,13 @@
           </a:solidFill>
           <a:ln/>
         </p:spPr>
+        <p:txBody>
+          <a:bodyPr/>
+          <a:lstStyle/>
+          <a:p>
+            <a:endParaRPr lang="en-US"/>
+          </a:p>
+        </p:txBody>
       </p:sp>
       <p:sp>
         <p:nvSpPr>
@@ -3916,11 +3498,11 @@
           </a:bodyPr>
           <a:lstStyle/>
           <a:p>
-            <a:pPr algn="l" indent="0" marL="0">
-              <a:buNone/>
-            </a:pPr>
-            <a:r>
-              <a:rPr lang="en-US" sz="1350" spc="135" kern="0" dirty="0">
+            <a:pPr marL="0" indent="0" algn="l">
+              <a:buNone/>
+            </a:pPr>
+            <a:r>
+              <a:rPr lang="en-US" sz="1350" kern="0" spc="135" dirty="0">
                 <a:solidFill>
                   <a:srgbClr val="36CDFF"/>
                 </a:solidFill>
@@ -3930,11 +3512,8 @@
               </a:rPr>
               <a:t>DAY 1 — THE MODEL AND ITS DATA </a:t>
             </a:r>
-            <a:pPr algn="l" indent="0" marL="0">
-              <a:buNone/>
-            </a:pPr>
-            <a:r>
-              <a:rPr lang="en-US" sz="1350" spc="135" kern="0" dirty="0">
+            <a:r>
+              <a:rPr lang="en-US" sz="1350" kern="0" spc="135" dirty="0">
                 <a:solidFill>
                   <a:srgbClr val="969696"/>
                 </a:solidFill>
@@ -3971,11 +3550,11 @@
           </a:bodyPr>
           <a:lstStyle/>
           <a:p>
-            <a:pPr algn="l" indent="0" marL="0">
-              <a:buNone/>
-            </a:pPr>
-            <a:r>
-              <a:rPr lang="en-US" sz="1350" spc="135" kern="0" dirty="0">
+            <a:pPr marL="0" indent="0" algn="l">
+              <a:buNone/>
+            </a:pPr>
+            <a:r>
+              <a:rPr lang="en-US" sz="1350" kern="0" spc="135" dirty="0">
                 <a:solidFill>
                   <a:srgbClr val="FD7EF5"/>
                 </a:solidFill>
@@ -3985,11 +3564,8 @@
               </a:rPr>
               <a:t>DAY 2 — THE MODEL WITH HANDS </a:t>
             </a:r>
-            <a:pPr algn="l" indent="0" marL="0">
-              <a:buNone/>
-            </a:pPr>
-            <a:r>
-              <a:rPr lang="en-US" sz="1350" spc="135" kern="0" dirty="0">
+            <a:r>
+              <a:rPr lang="en-US" sz="1350" kern="0" spc="135" dirty="0">
                 <a:solidFill>
                   <a:srgbClr val="969696"/>
                 </a:solidFill>
@@ -4024,6 +3600,13 @@
           </a:solidFill>
           <a:ln/>
         </p:spPr>
+        <p:txBody>
+          <a:bodyPr/>
+          <a:lstStyle/>
+          <a:p>
+            <a:endParaRPr lang="en-US"/>
+          </a:p>
+        </p:txBody>
       </p:sp>
       <p:sp>
         <p:nvSpPr>
@@ -4048,7 +3631,7 @@
           </a:bodyPr>
           <a:lstStyle/>
           <a:p>
-            <a:pPr algn="l" indent="0" marL="0">
+            <a:pPr marL="0" indent="0" algn="l">
               <a:lnSpc>
                 <a:spcPct val="117581"/>
               </a:lnSpc>
@@ -4090,6 +3673,13 @@
           </a:solidFill>
           <a:ln/>
         </p:spPr>
+        <p:txBody>
+          <a:bodyPr/>
+          <a:lstStyle/>
+          <a:p>
+            <a:endParaRPr lang="en-US"/>
+          </a:p>
+        </p:txBody>
       </p:sp>
       <p:sp>
         <p:nvSpPr>
@@ -4114,7 +3704,7 @@
           </a:bodyPr>
           <a:lstStyle/>
           <a:p>
-            <a:pPr algn="l" indent="0" marL="0">
+            <a:pPr marL="0" indent="0" algn="l">
               <a:lnSpc>
                 <a:spcPct val="117581"/>
               </a:lnSpc>
@@ -4131,12 +3721,6 @@
               </a:rPr>
               <a:t>L3 </a:t>
             </a:r>
-            <a:pPr algn="l" indent="0" marL="0">
-              <a:lnSpc>
-                <a:spcPct val="117581"/>
-              </a:lnSpc>
-              <a:buNone/>
-            </a:pPr>
             <a:r>
               <a:rPr lang="en-US" sz="2025" dirty="0">
                 <a:solidFill>
@@ -4173,6 +3757,13 @@
           </a:solidFill>
           <a:ln/>
         </p:spPr>
+        <p:txBody>
+          <a:bodyPr/>
+          <a:lstStyle/>
+          <a:p>
+            <a:endParaRPr lang="en-US"/>
+          </a:p>
+        </p:txBody>
       </p:sp>
       <p:sp>
         <p:nvSpPr>
@@ -4197,7 +3788,7 @@
           </a:bodyPr>
           <a:lstStyle/>
           <a:p>
-            <a:pPr algn="l" indent="0" marL="0">
+            <a:pPr marL="0" indent="0" algn="l">
               <a:lnSpc>
                 <a:spcPct val="117581"/>
               </a:lnSpc>
@@ -4239,6 +3830,13 @@
           </a:solidFill>
           <a:ln/>
         </p:spPr>
+        <p:txBody>
+          <a:bodyPr/>
+          <a:lstStyle/>
+          <a:p>
+            <a:endParaRPr lang="en-US"/>
+          </a:p>
+        </p:txBody>
       </p:sp>
       <p:sp>
         <p:nvSpPr>
@@ -4263,7 +3861,7 @@
           </a:bodyPr>
           <a:lstStyle/>
           <a:p>
-            <a:pPr algn="l" indent="0" marL="0">
+            <a:pPr marL="0" indent="0" algn="l">
               <a:lnSpc>
                 <a:spcPct val="117581"/>
               </a:lnSpc>
@@ -4280,12 +3878,6 @@
               </a:rPr>
               <a:t>L4 </a:t>
             </a:r>
-            <a:pPr algn="l" indent="0" marL="0">
-              <a:lnSpc>
-                <a:spcPct val="117581"/>
-              </a:lnSpc>
-              <a:buNone/>
-            </a:pPr>
             <a:r>
               <a:rPr lang="en-US" sz="2025" dirty="0">
                 <a:solidFill>
@@ -4322,6 +3914,13 @@
           </a:solidFill>
           <a:ln/>
         </p:spPr>
+        <p:txBody>
+          <a:bodyPr/>
+          <a:lstStyle/>
+          <a:p>
+            <a:endParaRPr lang="en-US"/>
+          </a:p>
+        </p:txBody>
       </p:sp>
       <p:sp>
         <p:nvSpPr>
@@ -4346,7 +3945,7 @@
           </a:bodyPr>
           <a:lstStyle/>
           <a:p>
-            <a:pPr algn="l" indent="0" marL="0">
+            <a:pPr marL="0" indent="0" algn="l">
               <a:lnSpc>
                 <a:spcPct val="117581"/>
               </a:lnSpc>
@@ -4388,6 +3987,13 @@
           </a:solidFill>
           <a:ln/>
         </p:spPr>
+        <p:txBody>
+          <a:bodyPr/>
+          <a:lstStyle/>
+          <a:p>
+            <a:endParaRPr lang="en-US"/>
+          </a:p>
+        </p:txBody>
       </p:sp>
       <p:sp>
         <p:nvSpPr>
@@ -4412,7 +4018,7 @@
           </a:bodyPr>
           <a:lstStyle/>
           <a:p>
-            <a:pPr algn="l" indent="0" marL="0">
+            <a:pPr marL="0" indent="0" algn="l">
               <a:lnSpc>
                 <a:spcPct val="117581"/>
               </a:lnSpc>
@@ -4429,12 +4035,6 @@
               </a:rPr>
               <a:t>L5 </a:t>
             </a:r>
-            <a:pPr algn="l" indent="0" marL="0">
-              <a:lnSpc>
-                <a:spcPct val="117581"/>
-              </a:lnSpc>
-              <a:buNone/>
-            </a:pPr>
             <a:r>
               <a:rPr lang="en-US" sz="2025" dirty="0">
                 <a:solidFill>
@@ -4471,6 +4071,13 @@
           </a:solidFill>
           <a:ln/>
         </p:spPr>
+        <p:txBody>
+          <a:bodyPr/>
+          <a:lstStyle/>
+          <a:p>
+            <a:endParaRPr lang="en-US"/>
+          </a:p>
+        </p:txBody>
       </p:sp>
       <p:sp>
         <p:nvSpPr>
@@ -4495,7 +4102,7 @@
           </a:bodyPr>
           <a:lstStyle/>
           <a:p>
-            <a:pPr algn="l" indent="0" marL="0">
+            <a:pPr marL="0" indent="0" algn="l">
               <a:lnSpc>
                 <a:spcPct val="117581"/>
               </a:lnSpc>
@@ -4537,6 +4144,13 @@
           </a:solidFill>
           <a:ln/>
         </p:spPr>
+        <p:txBody>
+          <a:bodyPr/>
+          <a:lstStyle/>
+          <a:p>
+            <a:endParaRPr lang="en-US"/>
+          </a:p>
+        </p:txBody>
       </p:sp>
       <p:sp>
         <p:nvSpPr>
@@ -4561,7 +4175,7 @@
           </a:bodyPr>
           <a:lstStyle/>
           <a:p>
-            <a:pPr algn="l" indent="0" marL="0">
+            <a:pPr marL="0" indent="0" algn="l">
               <a:buNone/>
             </a:pPr>
             <a:r>
@@ -4575,9 +4189,6 @@
               </a:rPr>
               <a:t>Warm up on </a:t>
             </a:r>
-            <a:pPr algn="l" indent="0" marL="0">
-              <a:buNone/>
-            </a:pPr>
             <a:r>
               <a:rPr lang="en-US" sz="1800" b="1" dirty="0">
                 <a:solidFill>
@@ -4589,9 +4200,6 @@
               </a:rPr>
               <a:t>Gandalf</a:t>
             </a:r>
-            <a:pPr algn="l" indent="0" marL="0">
-              <a:buNone/>
-            </a:pPr>
             <a:r>
               <a:rPr lang="en-US" sz="1800" dirty="0">
                 <a:solidFill>
@@ -4603,9 +4211,6 @@
               </a:rPr>
               <a:t>, then Day 1 runs </a:t>
             </a:r>
-            <a:pPr algn="l" indent="0" marL="0">
-              <a:buNone/>
-            </a:pPr>
             <a:r>
               <a:rPr lang="en-US" sz="1800" b="1" dirty="0">
                 <a:solidFill>
@@ -4617,9 +4222,6 @@
               </a:rPr>
               <a:t>keyless </a:t>
             </a:r>
-            <a:pPr algn="l" indent="0" marL="0">
-              <a:buNone/>
-            </a:pPr>
             <a:r>
               <a:rPr lang="en-US" sz="1800" dirty="0">
                 <a:solidFill>
@@ -4631,9 +4233,6 @@
               </a:rPr>
               <a:t>on a shared model. Day 2 is </a:t>
             </a:r>
-            <a:pPr algn="l" indent="0" marL="0">
-              <a:buNone/>
-            </a:pPr>
             <a:r>
               <a:rPr lang="en-US" sz="1800" b="1" dirty="0">
                 <a:solidFill>
@@ -4645,9 +4244,6 @@
               </a:rPr>
               <a:t>BYOK </a:t>
             </a:r>
-            <a:pPr algn="l" indent="0" marL="0">
-              <a:buNone/>
-            </a:pPr>
             <a:r>
               <a:rPr lang="en-US" sz="1800" dirty="0">
                 <a:solidFill>
@@ -4665,14 +4261,14 @@
       </p:sp>
       <p:pic>
         <p:nvPicPr>
-          <p:cNvPr id="23" name="Image 0" descr="preencoded.png">    </p:cNvPr>
+          <p:cNvPr id="23" name="Image 0" descr="preencoded.png"/>
           <p:cNvPicPr>
             <a:picLocks noChangeAspect="1"/>
           </p:cNvPicPr>
           <p:nvPr/>
         </p:nvPicPr>
         <p:blipFill>
-          <a:blip r:embed="rId1"/>
+          <a:blip r:embed="rId3"/>
           <a:stretch>
             <a:fillRect/>
           </a:stretch>
@@ -4710,11 +4306,11 @@
           </a:bodyPr>
           <a:lstStyle/>
           <a:p>
-            <a:pPr algn="l" indent="0" marL="0">
-              <a:buNone/>
-            </a:pPr>
-            <a:r>
-              <a:rPr lang="en-US" sz="1200" spc="264" kern="0" dirty="0">
+            <a:pPr marL="0" indent="0" algn="l">
+              <a:buNone/>
+            </a:pPr>
+            <a:r>
+              <a:rPr lang="en-US" sz="1200" kern="0" spc="264" dirty="0">
                 <a:solidFill>
                   <a:srgbClr val="969696"/>
                 </a:solidFill>
@@ -4744,6 +4340,7 @@
         <a:solidFill>
           <a:srgbClr val="000000"/>
         </a:solidFill>
+        <a:effectLst/>
       </p:bgPr>
     </p:bg>
     <p:spTree>
@@ -4783,11 +4380,11 @@
           </a:bodyPr>
           <a:lstStyle/>
           <a:p>
-            <a:pPr algn="l" indent="0" marL="0">
-              <a:buNone/>
-            </a:pPr>
-            <a:r>
-              <a:rPr lang="en-US" sz="1500" spc="450" kern="0" dirty="0">
+            <a:pPr marL="0" indent="0" algn="l">
+              <a:buNone/>
+            </a:pPr>
+            <a:r>
+              <a:rPr lang="en-US" sz="1500" kern="0" spc="450" dirty="0">
                 <a:solidFill>
                   <a:srgbClr val="36CDFF"/>
                 </a:solidFill>
@@ -4824,7 +4421,7 @@
           </a:bodyPr>
           <a:lstStyle/>
           <a:p>
-            <a:pPr algn="l" indent="0" marL="0">
+            <a:pPr marL="0" indent="0" algn="l">
               <a:lnSpc>
                 <a:spcPct val="78261"/>
               </a:lnSpc>
@@ -4866,6 +4463,13 @@
           </a:solidFill>
           <a:ln/>
         </p:spPr>
+        <p:txBody>
+          <a:bodyPr/>
+          <a:lstStyle/>
+          <a:p>
+            <a:endParaRPr lang="en-US"/>
+          </a:p>
+        </p:txBody>
       </p:sp>
       <p:sp>
         <p:nvSpPr>
@@ -4886,6 +4490,13 @@
           </a:solidFill>
           <a:ln/>
         </p:spPr>
+        <p:txBody>
+          <a:bodyPr/>
+          <a:lstStyle/>
+          <a:p>
+            <a:endParaRPr lang="en-US"/>
+          </a:p>
+        </p:txBody>
       </p:sp>
       <p:sp>
         <p:nvSpPr>
@@ -4908,6 +4519,13 @@
           </a:solidFill>
           <a:ln/>
         </p:spPr>
+        <p:txBody>
+          <a:bodyPr/>
+          <a:lstStyle/>
+          <a:p>
+            <a:endParaRPr lang="en-US"/>
+          </a:p>
+        </p:txBody>
       </p:sp>
       <p:sp>
         <p:nvSpPr>
@@ -4930,6 +4548,13 @@
           </a:solidFill>
           <a:ln/>
         </p:spPr>
+        <p:txBody>
+          <a:bodyPr/>
+          <a:lstStyle/>
+          <a:p>
+            <a:endParaRPr lang="en-US"/>
+          </a:p>
+        </p:txBody>
       </p:sp>
       <p:sp>
         <p:nvSpPr>
@@ -4954,11 +4579,11 @@
           </a:bodyPr>
           <a:lstStyle/>
           <a:p>
-            <a:pPr algn="l" indent="0" marL="0">
-              <a:buNone/>
-            </a:pPr>
-            <a:r>
-              <a:rPr lang="en-US" sz="1200" spc="168" kern="0" dirty="0">
+            <a:pPr marL="0" indent="0" algn="l">
+              <a:buNone/>
+            </a:pPr>
+            <a:r>
+              <a:rPr lang="en-US" sz="1200" kern="0" spc="168" dirty="0">
                 <a:solidFill>
                   <a:srgbClr val="36CDFF"/>
                 </a:solidFill>
@@ -4995,7 +4620,7 @@
           </a:bodyPr>
           <a:lstStyle/>
           <a:p>
-            <a:pPr algn="l" indent="0" marL="0">
+            <a:pPr marL="0" indent="0" algn="l">
               <a:lnSpc>
                 <a:spcPct val="79876"/>
               </a:lnSpc>
@@ -5039,7 +4664,7 @@
           </a:bodyPr>
           <a:lstStyle/>
           <a:p>
-            <a:pPr algn="l" indent="0" marL="0">
+            <a:pPr marL="0" indent="0" algn="l">
               <a:lnSpc>
                 <a:spcPct val="125667"/>
               </a:lnSpc>
@@ -5056,12 +4681,6 @@
               </a:rPr>
               <a:t>Hit the </a:t>
             </a:r>
-            <a:pPr algn="l" indent="0" marL="0">
-              <a:lnSpc>
-                <a:spcPct val="125667"/>
-              </a:lnSpc>
-              <a:buNone/>
-            </a:pPr>
             <a:r>
               <a:rPr lang="en-US" sz="1950" b="1" dirty="0">
                 <a:solidFill>
@@ -5073,12 +4692,6 @@
               </a:rPr>
               <a:t>hosted </a:t>
             </a:r>
-            <a:pPr algn="l" indent="0" marL="0">
-              <a:lnSpc>
-                <a:spcPct val="125667"/>
-              </a:lnSpc>
-              <a:buNone/>
-            </a:pPr>
             <a:r>
               <a:rPr lang="en-US" sz="1950" dirty="0">
                 <a:solidFill>
@@ -5115,6 +4728,13 @@
           </a:solidFill>
           <a:ln/>
         </p:spPr>
+        <p:txBody>
+          <a:bodyPr/>
+          <a:lstStyle/>
+          <a:p>
+            <a:endParaRPr lang="en-US"/>
+          </a:p>
+        </p:txBody>
       </p:sp>
       <p:sp>
         <p:nvSpPr>
@@ -5139,7 +4759,7 @@
           </a:bodyPr>
           <a:lstStyle/>
           <a:p>
-            <a:pPr algn="l" indent="0" marL="0">
+            <a:pPr marL="0" indent="0" algn="l">
               <a:lnSpc>
                 <a:spcPct val="121333"/>
               </a:lnSpc>
@@ -5181,6 +4801,13 @@
           </a:solidFill>
           <a:ln/>
         </p:spPr>
+        <p:txBody>
+          <a:bodyPr/>
+          <a:lstStyle/>
+          <a:p>
+            <a:endParaRPr lang="en-US"/>
+          </a:p>
+        </p:txBody>
       </p:sp>
       <p:sp>
         <p:nvSpPr>
@@ -5205,7 +4832,7 @@
           </a:bodyPr>
           <a:lstStyle/>
           <a:p>
-            <a:pPr algn="l" indent="0" marL="0">
+            <a:pPr marL="0" indent="0" algn="l">
               <a:lnSpc>
                 <a:spcPct val="121333"/>
               </a:lnSpc>
@@ -5247,6 +4874,13 @@
           </a:solidFill>
           <a:ln/>
         </p:spPr>
+        <p:txBody>
+          <a:bodyPr/>
+          <a:lstStyle/>
+          <a:p>
+            <a:endParaRPr lang="en-US"/>
+          </a:p>
+        </p:txBody>
       </p:sp>
       <p:sp>
         <p:nvSpPr>
@@ -5267,6 +4901,13 @@
           </a:solidFill>
           <a:ln/>
         </p:spPr>
+        <p:txBody>
+          <a:bodyPr/>
+          <a:lstStyle/>
+          <a:p>
+            <a:endParaRPr lang="en-US"/>
+          </a:p>
+        </p:txBody>
       </p:sp>
       <p:sp>
         <p:nvSpPr>
@@ -5289,6 +4930,13 @@
           </a:solidFill>
           <a:ln/>
         </p:spPr>
+        <p:txBody>
+          <a:bodyPr/>
+          <a:lstStyle/>
+          <a:p>
+            <a:endParaRPr lang="en-US"/>
+          </a:p>
+        </p:txBody>
       </p:sp>
       <p:sp>
         <p:nvSpPr>
@@ -5311,6 +4959,13 @@
           </a:solidFill>
           <a:ln/>
         </p:spPr>
+        <p:txBody>
+          <a:bodyPr/>
+          <a:lstStyle/>
+          <a:p>
+            <a:endParaRPr lang="en-US"/>
+          </a:p>
+        </p:txBody>
       </p:sp>
       <p:sp>
         <p:nvSpPr>
@@ -5335,11 +4990,11 @@
           </a:bodyPr>
           <a:lstStyle/>
           <a:p>
-            <a:pPr algn="l" indent="0" marL="0">
-              <a:buNone/>
-            </a:pPr>
-            <a:r>
-              <a:rPr lang="en-US" sz="1200" spc="168" kern="0" dirty="0">
+            <a:pPr marL="0" indent="0" algn="l">
+              <a:buNone/>
+            </a:pPr>
+            <a:r>
+              <a:rPr lang="en-US" sz="1200" kern="0" spc="168" dirty="0">
                 <a:solidFill>
                   <a:srgbClr val="FD7EF5"/>
                 </a:solidFill>
@@ -5376,7 +5031,7 @@
           </a:bodyPr>
           <a:lstStyle/>
           <a:p>
-            <a:pPr algn="l" indent="0" marL="0">
+            <a:pPr marL="0" indent="0" algn="l">
               <a:lnSpc>
                 <a:spcPct val="79876"/>
               </a:lnSpc>
@@ -5420,7 +5075,7 @@
           </a:bodyPr>
           <a:lstStyle/>
           <a:p>
-            <a:pPr algn="l" indent="0" marL="0">
+            <a:pPr marL="0" indent="0" algn="l">
               <a:lnSpc>
                 <a:spcPct val="125667"/>
               </a:lnSpc>
@@ -5437,12 +5092,6 @@
               </a:rPr>
               <a:t>Clone </a:t>
             </a:r>
-            <a:pPr algn="l" indent="0" marL="0">
-              <a:lnSpc>
-                <a:spcPct val="125667"/>
-              </a:lnSpc>
-              <a:buNone/>
-            </a:pPr>
             <a:r>
               <a:rPr lang="en-US" sz="1950" dirty="0">
                 <a:solidFill>
@@ -5479,6 +5128,13 @@
           </a:solidFill>
           <a:ln/>
         </p:spPr>
+        <p:txBody>
+          <a:bodyPr/>
+          <a:lstStyle/>
+          <a:p>
+            <a:endParaRPr lang="en-US"/>
+          </a:p>
+        </p:txBody>
       </p:sp>
       <p:sp>
         <p:nvSpPr>
@@ -5503,7 +5159,7 @@
           </a:bodyPr>
           <a:lstStyle/>
           <a:p>
-            <a:pPr algn="l" indent="0" marL="0">
+            <a:pPr marL="0" indent="0" algn="l">
               <a:lnSpc>
                 <a:spcPct val="121333"/>
               </a:lnSpc>
@@ -5520,12 +5176,6 @@
               </a:rPr>
               <a:t>Build → Break → Secure the </a:t>
             </a:r>
-            <a:pPr algn="l" indent="0" marL="0">
-              <a:lnSpc>
-                <a:spcPct val="121333"/>
-              </a:lnSpc>
-              <a:buNone/>
-            </a:pPr>
             <a:r>
               <a:rPr lang="en-US" sz="1950" b="1" dirty="0">
                 <a:solidFill>
@@ -5537,12 +5187,6 @@
               </a:rPr>
               <a:t>real guard code </a:t>
             </a:r>
-            <a:pPr algn="l" indent="0" marL="0">
-              <a:lnSpc>
-                <a:spcPct val="121333"/>
-              </a:lnSpc>
-              <a:buNone/>
-            </a:pPr>
             <a:r>
               <a:rPr lang="en-US" sz="1950" dirty="0">
                 <a:solidFill>
@@ -5579,6 +5223,13 @@
           </a:solidFill>
           <a:ln/>
         </p:spPr>
+        <p:txBody>
+          <a:bodyPr/>
+          <a:lstStyle/>
+          <a:p>
+            <a:endParaRPr lang="en-US"/>
+          </a:p>
+        </p:txBody>
       </p:sp>
       <p:sp>
         <p:nvSpPr>
@@ -5603,7 +5254,7 @@
           </a:bodyPr>
           <a:lstStyle/>
           <a:p>
-            <a:pPr algn="l" indent="0" marL="0">
+            <a:pPr marL="0" indent="0" algn="l">
               <a:lnSpc>
                 <a:spcPct val="121333"/>
               </a:lnSpc>
@@ -5620,12 +5271,6 @@
               </a:rPr>
               <a:t>Flip the </a:t>
             </a:r>
-            <a:pPr algn="l" indent="0" marL="0">
-              <a:lnSpc>
-                <a:spcPct val="121333"/>
-              </a:lnSpc>
-              <a:buNone/>
-            </a:pPr>
             <a:r>
               <a:rPr lang="en-US" sz="1725" dirty="0">
                 <a:solidFill>
@@ -5637,12 +5282,6 @@
               </a:rPr>
               <a:t>SEC_* </a:t>
             </a:r>
-            <a:pPr algn="l" indent="0" marL="0">
-              <a:lnSpc>
-                <a:spcPct val="121333"/>
-              </a:lnSpc>
-              <a:buNone/>
-            </a:pPr>
             <a:r>
               <a:rPr lang="en-US" sz="1950" dirty="0">
                 <a:solidFill>
@@ -5681,7 +5320,7 @@
           </a:bodyPr>
           <a:lstStyle/>
           <a:p>
-            <a:pPr algn="l" indent="0" marL="0">
+            <a:pPr marL="0" indent="0" algn="l">
               <a:buNone/>
             </a:pPr>
             <a:r>
@@ -5695,9 +5334,6 @@
               </a:rPr>
               <a:t>Switch lanes </a:t>
             </a:r>
-            <a:pPr algn="l" indent="0" marL="0">
-              <a:buNone/>
-            </a:pPr>
             <a:r>
               <a:rPr lang="en-US" sz="1950" b="1" dirty="0">
                 <a:solidFill>
@@ -5709,9 +5345,6 @@
               </a:rPr>
               <a:t>any module</a:t>
             </a:r>
-            <a:pPr algn="l" indent="0" marL="0">
-              <a:buNone/>
-            </a:pPr>
             <a:r>
               <a:rPr lang="en-US" sz="1950" dirty="0">
                 <a:solidFill>
@@ -5723,9 +5356,6 @@
               </a:rPr>
               <a:t>. Builders: setup is one page in </a:t>
             </a:r>
-            <a:pPr algn="l" indent="0" marL="0">
-              <a:buNone/>
-            </a:pPr>
             <a:r>
               <a:rPr lang="en-US" sz="1800" dirty="0">
                 <a:solidFill>
@@ -5737,9 +5367,6 @@
               </a:rPr>
               <a:t>prereqs/</a:t>
             </a:r>
-            <a:pPr algn="l" indent="0" marL="0">
-              <a:buNone/>
-            </a:pPr>
             <a:r>
               <a:rPr lang="en-US" sz="1950" dirty="0">
                 <a:solidFill>
@@ -5757,14 +5384,14 @@
       </p:sp>
       <p:pic>
         <p:nvPicPr>
-          <p:cNvPr id="27" name="Image 0" descr="preencoded.png">    </p:cNvPr>
+          <p:cNvPr id="27" name="Image 0" descr="preencoded.png"/>
           <p:cNvPicPr>
             <a:picLocks noChangeAspect="1"/>
           </p:cNvPicPr>
           <p:nvPr/>
         </p:nvPicPr>
         <p:blipFill>
-          <a:blip r:embed="rId1"/>
+          <a:blip r:embed="rId3"/>
           <a:stretch>
             <a:fillRect/>
           </a:stretch>
@@ -5802,11 +5429,11 @@
           </a:bodyPr>
           <a:lstStyle/>
           <a:p>
-            <a:pPr algn="l" indent="0" marL="0">
-              <a:buNone/>
-            </a:pPr>
-            <a:r>
-              <a:rPr lang="en-US" sz="1200" spc="264" kern="0" dirty="0">
+            <a:pPr marL="0" indent="0" algn="l">
+              <a:buNone/>
+            </a:pPr>
+            <a:r>
+              <a:rPr lang="en-US" sz="1200" kern="0" spc="264" dirty="0">
                 <a:solidFill>
                   <a:srgbClr val="969696"/>
                 </a:solidFill>
@@ -5836,6 +5463,7 @@
         <a:solidFill>
           <a:srgbClr val="000000"/>
         </a:solidFill>
+        <a:effectLst/>
       </p:bgPr>
     </p:bg>
     <p:spTree>
@@ -5875,11 +5503,11 @@
           </a:bodyPr>
           <a:lstStyle/>
           <a:p>
-            <a:pPr algn="l" indent="0" marL="0">
-              <a:buNone/>
-            </a:pPr>
-            <a:r>
-              <a:rPr lang="en-US" sz="1500" spc="450" kern="0" dirty="0">
+            <a:pPr marL="0" indent="0" algn="l">
+              <a:buNone/>
+            </a:pPr>
+            <a:r>
+              <a:rPr lang="en-US" sz="1500" kern="0" spc="450" dirty="0">
                 <a:solidFill>
                   <a:srgbClr val="36CDFF"/>
                 </a:solidFill>
@@ -5916,7 +5544,7 @@
           </a:bodyPr>
           <a:lstStyle/>
           <a:p>
-            <a:pPr algn="l" indent="0" marL="0">
+            <a:pPr marL="0" indent="0" algn="l">
               <a:lnSpc>
                 <a:spcPct val="78326"/>
               </a:lnSpc>
@@ -5960,7 +5588,7 @@
           </a:bodyPr>
           <a:lstStyle/>
           <a:p>
-            <a:pPr algn="l" indent="0" marL="0">
+            <a:pPr marL="0" indent="0" algn="l">
               <a:lnSpc>
                 <a:spcPct val="126087"/>
               </a:lnSpc>
@@ -5977,12 +5605,6 @@
               </a:rPr>
               <a:t>Every module, the </a:t>
             </a:r>
-            <a:pPr algn="l" indent="0" marL="0">
-              <a:lnSpc>
-                <a:spcPct val="126087"/>
-              </a:lnSpc>
-              <a:buNone/>
-            </a:pPr>
             <a:r>
               <a:rPr lang="en-US" sz="2250" b="1" dirty="0">
                 <a:solidFill>
@@ -5994,12 +5616,6 @@
               </a:rPr>
               <a:t>same five beats </a:t>
             </a:r>
-            <a:pPr algn="l" indent="0" marL="0">
-              <a:lnSpc>
-                <a:spcPct val="126087"/>
-              </a:lnSpc>
-              <a:buNone/>
-            </a:pPr>
             <a:r>
               <a:rPr lang="en-US" sz="2250" dirty="0">
                 <a:solidFill>
@@ -6036,6 +5652,13 @@
           </a:solidFill>
           <a:ln/>
         </p:spPr>
+        <p:txBody>
+          <a:bodyPr/>
+          <a:lstStyle/>
+          <a:p>
+            <a:endParaRPr lang="en-US"/>
+          </a:p>
+        </p:txBody>
       </p:sp>
       <p:sp>
         <p:nvSpPr>
@@ -6060,7 +5683,7 @@
           </a:bodyPr>
           <a:lstStyle/>
           <a:p>
-            <a:pPr algn="l" indent="0" marL="0">
+            <a:pPr marL="0" indent="0" algn="l">
               <a:buNone/>
             </a:pPr>
             <a:r>
@@ -6101,7 +5724,7 @@
           </a:bodyPr>
           <a:lstStyle/>
           <a:p>
-            <a:pPr algn="l" indent="0" marL="0">
+            <a:pPr marL="0" indent="0" algn="l">
               <a:lnSpc>
                 <a:spcPct val="108696"/>
               </a:lnSpc>
@@ -6145,7 +5768,7 @@
           </a:bodyPr>
           <a:lstStyle/>
           <a:p>
-            <a:pPr algn="l" indent="0" marL="0">
+            <a:pPr marL="0" indent="0" algn="l">
               <a:lnSpc>
                 <a:spcPct val="126545"/>
               </a:lnSpc>
@@ -6187,6 +5810,13 @@
           </a:solidFill>
           <a:ln/>
         </p:spPr>
+        <p:txBody>
+          <a:bodyPr/>
+          <a:lstStyle/>
+          <a:p>
+            <a:endParaRPr lang="en-US"/>
+          </a:p>
+        </p:txBody>
       </p:sp>
       <p:sp>
         <p:nvSpPr>
@@ -6211,7 +5841,7 @@
           </a:bodyPr>
           <a:lstStyle/>
           <a:p>
-            <a:pPr algn="l" indent="0" marL="0">
+            <a:pPr marL="0" indent="0" algn="l">
               <a:buNone/>
             </a:pPr>
             <a:r>
@@ -6252,7 +5882,7 @@
           </a:bodyPr>
           <a:lstStyle/>
           <a:p>
-            <a:pPr algn="l" indent="0" marL="0">
+            <a:pPr marL="0" indent="0" algn="l">
               <a:lnSpc>
                 <a:spcPct val="108696"/>
               </a:lnSpc>
@@ -6296,7 +5926,7 @@
           </a:bodyPr>
           <a:lstStyle/>
           <a:p>
-            <a:pPr algn="l" indent="0" marL="0">
+            <a:pPr marL="0" indent="0" algn="l">
               <a:lnSpc>
                 <a:spcPct val="126545"/>
               </a:lnSpc>
@@ -6338,6 +5968,13 @@
           </a:solidFill>
           <a:ln/>
         </p:spPr>
+        <p:txBody>
+          <a:bodyPr/>
+          <a:lstStyle/>
+          <a:p>
+            <a:endParaRPr lang="en-US"/>
+          </a:p>
+        </p:txBody>
       </p:sp>
       <p:sp>
         <p:nvSpPr>
@@ -6362,7 +5999,7 @@
           </a:bodyPr>
           <a:lstStyle/>
           <a:p>
-            <a:pPr algn="l" indent="0" marL="0">
+            <a:pPr marL="0" indent="0" algn="l">
               <a:buNone/>
             </a:pPr>
             <a:r>
@@ -6403,7 +6040,7 @@
           </a:bodyPr>
           <a:lstStyle/>
           <a:p>
-            <a:pPr algn="l" indent="0" marL="0">
+            <a:pPr marL="0" indent="0" algn="l">
               <a:lnSpc>
                 <a:spcPct val="108696"/>
               </a:lnSpc>
@@ -6447,7 +6084,7 @@
           </a:bodyPr>
           <a:lstStyle/>
           <a:p>
-            <a:pPr algn="l" indent="0" marL="0">
+            <a:pPr marL="0" indent="0" algn="l">
               <a:lnSpc>
                 <a:spcPct val="126545"/>
               </a:lnSpc>
@@ -6489,6 +6126,13 @@
           </a:solidFill>
           <a:ln/>
         </p:spPr>
+        <p:txBody>
+          <a:bodyPr/>
+          <a:lstStyle/>
+          <a:p>
+            <a:endParaRPr lang="en-US"/>
+          </a:p>
+        </p:txBody>
       </p:sp>
       <p:sp>
         <p:nvSpPr>
@@ -6513,7 +6157,7 @@
           </a:bodyPr>
           <a:lstStyle/>
           <a:p>
-            <a:pPr algn="l" indent="0" marL="0">
+            <a:pPr marL="0" indent="0" algn="l">
               <a:buNone/>
             </a:pPr>
             <a:r>
@@ -6554,7 +6198,7 @@
           </a:bodyPr>
           <a:lstStyle/>
           <a:p>
-            <a:pPr algn="l" indent="0" marL="0">
+            <a:pPr marL="0" indent="0" algn="l">
               <a:lnSpc>
                 <a:spcPct val="108696"/>
               </a:lnSpc>
@@ -6598,7 +6242,7 @@
           </a:bodyPr>
           <a:lstStyle/>
           <a:p>
-            <a:pPr algn="l" indent="0" marL="0">
+            <a:pPr marL="0" indent="0" algn="l">
               <a:lnSpc>
                 <a:spcPct val="126545"/>
               </a:lnSpc>
@@ -6640,6 +6284,13 @@
           </a:solidFill>
           <a:ln/>
         </p:spPr>
+        <p:txBody>
+          <a:bodyPr/>
+          <a:lstStyle/>
+          <a:p>
+            <a:endParaRPr lang="en-US"/>
+          </a:p>
+        </p:txBody>
       </p:sp>
       <p:sp>
         <p:nvSpPr>
@@ -6664,7 +6315,7 @@
           </a:bodyPr>
           <a:lstStyle/>
           <a:p>
-            <a:pPr algn="l" indent="0" marL="0">
+            <a:pPr marL="0" indent="0" algn="l">
               <a:buNone/>
             </a:pPr>
             <a:r>
@@ -6705,7 +6356,7 @@
           </a:bodyPr>
           <a:lstStyle/>
           <a:p>
-            <a:pPr algn="l" indent="0" marL="0">
+            <a:pPr marL="0" indent="0" algn="l">
               <a:lnSpc>
                 <a:spcPct val="108696"/>
               </a:lnSpc>
@@ -6749,7 +6400,7 @@
           </a:bodyPr>
           <a:lstStyle/>
           <a:p>
-            <a:pPr algn="l" indent="0" marL="0">
+            <a:pPr marL="0" indent="0" algn="l">
               <a:lnSpc>
                 <a:spcPct val="126545"/>
               </a:lnSpc>
@@ -6793,7 +6444,7 @@
           </a:bodyPr>
           <a:lstStyle/>
           <a:p>
-            <a:pPr algn="l" indent="0" marL="0">
+            <a:pPr marL="0" indent="0" algn="l">
               <a:buNone/>
             </a:pPr>
             <a:r>
@@ -6807,9 +6458,6 @@
               </a:rPr>
               <a:t>You pass by mechanism, not the model’s words </a:t>
             </a:r>
-            <a:pPr algn="l" indent="0" marL="0">
-              <a:buNone/>
-            </a:pPr>
             <a:r>
               <a:rPr lang="en-US" sz="1950" dirty="0">
                 <a:solidFill>
@@ -6827,14 +6475,14 @@
       </p:sp>
       <p:pic>
         <p:nvPicPr>
-          <p:cNvPr id="26" name="Image 0" descr="preencoded.png">    </p:cNvPr>
+          <p:cNvPr id="26" name="Image 0" descr="preencoded.png"/>
           <p:cNvPicPr>
             <a:picLocks noChangeAspect="1"/>
           </p:cNvPicPr>
           <p:nvPr/>
         </p:nvPicPr>
         <p:blipFill>
-          <a:blip r:embed="rId1"/>
+          <a:blip r:embed="rId3"/>
           <a:stretch>
             <a:fillRect/>
           </a:stretch>
@@ -6872,11 +6520,11 @@
           </a:bodyPr>
           <a:lstStyle/>
           <a:p>
-            <a:pPr algn="l" indent="0" marL="0">
-              <a:buNone/>
-            </a:pPr>
-            <a:r>
-              <a:rPr lang="en-US" sz="1200" spc="264" kern="0" dirty="0">
+            <a:pPr marL="0" indent="0" algn="l">
+              <a:buNone/>
+            </a:pPr>
+            <a:r>
+              <a:rPr lang="en-US" sz="1200" kern="0" spc="264" dirty="0">
                 <a:solidFill>
                   <a:srgbClr val="969696"/>
                 </a:solidFill>
@@ -6906,6 +6554,7 @@
         <a:solidFill>
           <a:srgbClr val="000000"/>
         </a:solidFill>
+        <a:effectLst/>
       </p:bgPr>
     </p:bg>
     <p:spTree>
@@ -6945,11 +6594,11 @@
           </a:bodyPr>
           <a:lstStyle/>
           <a:p>
-            <a:pPr algn="l" indent="0" marL="0">
-              <a:buNone/>
-            </a:pPr>
-            <a:r>
-              <a:rPr lang="en-US" sz="1650" spc="495" kern="0" dirty="0">
+            <a:pPr marL="0" indent="0" algn="l">
+              <a:buNone/>
+            </a:pPr>
+            <a:r>
+              <a:rPr lang="en-US" sz="1650" kern="0" spc="495" dirty="0">
                 <a:solidFill>
                   <a:srgbClr val="FD7EF5"/>
                 </a:solidFill>
@@ -6986,7 +6635,7 @@
           </a:bodyPr>
           <a:lstStyle/>
           <a:p>
-            <a:pPr algn="l" indent="0" marL="0">
+            <a:pPr marL="0" indent="0" algn="l">
               <a:lnSpc>
                 <a:spcPct val="78416"/>
               </a:lnSpc>
@@ -7030,7 +6679,7 @@
           </a:bodyPr>
           <a:lstStyle/>
           <a:p>
-            <a:pPr algn="l" indent="0" marL="0">
+            <a:pPr marL="0" indent="0" algn="l">
               <a:lnSpc>
                 <a:spcPct val="126087"/>
               </a:lnSpc>
@@ -7045,26 +6694,32 @@
                 <a:ea typeface="Arial" pitchFamily="34" charset="-122"/>
                 <a:cs typeface="Arial" pitchFamily="34" charset="-120"/>
               </a:rPr>
-              <a:t>HubSpot, email, Slack, on Bedrock, with an autonomous planner→reviewer loop. At </a:t>
-            </a:r>
-            <a:pPr algn="l" indent="0" marL="0">
+              <a:t>HubSpot, email, Slack, on Bedrock, with an autonomous planner→reviewer loop.</a:t>
+            </a:r>
+            <a:endParaRPr lang="en-US" sz="2250" dirty="0"/>
+          </a:p>
+          <a:p>
+            <a:pPr marL="0" indent="0" algn="l">
               <a:lnSpc>
                 <a:spcPct val="126087"/>
               </a:lnSpc>
               <a:buNone/>
             </a:pPr>
             <a:r>
-              <a:rPr lang="en-US" sz="2250" b="1" dirty="0">
-                <a:solidFill>
-                  <a:srgbClr val="FFFFFF"/>
-                </a:solidFill>
-                <a:latin typeface="Arial" pitchFamily="34" charset="0"/>
-                <a:ea typeface="Arial" pitchFamily="34" charset="-122"/>
-                <a:cs typeface="Arial" pitchFamily="34" charset="-120"/>
-              </a:rPr>
-              <a:t>four points </a:t>
-            </a:r>
-            <a:pPr algn="l" indent="0" marL="0">
+              <a:rPr lang="en-US" sz="2250" dirty="0">
+                <a:solidFill>
+                  <a:srgbClr val="C8C8C8"/>
+                </a:solidFill>
+                <a:latin typeface="Arial" pitchFamily="34" charset="0"/>
+                <a:ea typeface="Arial" pitchFamily="34" charset="-122"/>
+                <a:cs typeface="Arial" pitchFamily="34" charset="-120"/>
+              </a:rPr>
+              <a:t>At four points across the two days we don’t just theorise — we drive Claude Code against Anna’s real code, live, and deliver a verdict: is this attack real, or theater?</a:t>
+            </a:r>
+            <a:endParaRPr lang="en-US" sz="2250" dirty="0"/>
+          </a:p>
+          <a:p>
+            <a:pPr marL="0" indent="0" algn="l">
               <a:lnSpc>
                 <a:spcPct val="126087"/>
               </a:lnSpc>
@@ -7079,57 +6734,6 @@
                 <a:ea typeface="Arial" pitchFamily="34" charset="-122"/>
                 <a:cs typeface="Arial" pitchFamily="34" charset="-120"/>
               </a:rPr>
-              <a:t>across the two days we do not just theorise — we </a:t>
-            </a:r>
-            <a:pPr algn="l" indent="0" marL="0">
-              <a:lnSpc>
-                <a:spcPct val="126087"/>
-              </a:lnSpc>
-              <a:buNone/>
-            </a:pPr>
-            <a:r>
-              <a:rPr lang="en-US" sz="2250" b="1" dirty="0">
-                <a:solidFill>
-                  <a:srgbClr val="FFFFFF"/>
-                </a:solidFill>
-                <a:latin typeface="Arial" pitchFamily="34" charset="0"/>
-                <a:ea typeface="Arial" pitchFamily="34" charset="-122"/>
-                <a:cs typeface="Arial" pitchFamily="34" charset="-120"/>
-              </a:rPr>
-              <a:t>drive Claude Code against Anna’s real code, live</a:t>
-            </a:r>
-            <a:pPr algn="l" indent="0" marL="0">
-              <a:lnSpc>
-                <a:spcPct val="126087"/>
-              </a:lnSpc>
-              <a:buNone/>
-            </a:pPr>
-            <a:r>
-              <a:rPr lang="en-US" sz="2250" dirty="0">
-                <a:solidFill>
-                  <a:srgbClr val="C8C8C8"/>
-                </a:solidFill>
-                <a:latin typeface="Arial" pitchFamily="34" charset="0"/>
-                <a:ea typeface="Arial" pitchFamily="34" charset="-122"/>
-                <a:cs typeface="Arial" pitchFamily="34" charset="-120"/>
-              </a:rPr>
-              <a:t>, and deliver a verdict: is this attack real, or theater? </a:t>
-            </a:r>
-            <a:pPr algn="l" indent="0" marL="0">
-              <a:lnSpc>
-                <a:spcPct val="126087"/>
-              </a:lnSpc>
-              <a:buNone/>
-            </a:pPr>
-            <a:r>
-              <a:rPr lang="en-US" sz="2250" dirty="0">
-                <a:solidFill>
-                  <a:srgbClr val="FFFFFF"/>
-                </a:solidFill>
-                <a:latin typeface="Arial" pitchFamily="34" charset="0"/>
-                <a:ea typeface="Arial" pitchFamily="34" charset="-122"/>
-                <a:cs typeface="Arial" pitchFamily="34" charset="-120"/>
-              </a:rPr>
               <a:t>Everything you break in the lab, we test against a real app. That is the method you take home.</a:t>
             </a:r>
             <a:endParaRPr lang="en-US" sz="2250" dirty="0"/>
@@ -7138,14 +6742,14 @@
       </p:sp>
       <p:pic>
         <p:nvPicPr>
-          <p:cNvPr id="5" name="Image 0" descr="preencoded.png">    </p:cNvPr>
+          <p:cNvPr id="5" name="Image 0" descr="preencoded.png"/>
           <p:cNvPicPr>
             <a:picLocks noChangeAspect="1"/>
           </p:cNvPicPr>
           <p:nvPr/>
         </p:nvPicPr>
         <p:blipFill>
-          <a:blip r:embed="rId1"/>
+          <a:blip r:embed="rId3"/>
           <a:stretch>
             <a:fillRect/>
           </a:stretch>
@@ -7183,11 +6787,11 @@
           </a:bodyPr>
           <a:lstStyle/>
           <a:p>
-            <a:pPr algn="l" indent="0" marL="0">
-              <a:buNone/>
-            </a:pPr>
-            <a:r>
-              <a:rPr lang="en-US" sz="1200" spc="264" kern="0" dirty="0">
+            <a:pPr marL="0" indent="0" algn="l">
+              <a:buNone/>
+            </a:pPr>
+            <a:r>
+              <a:rPr lang="en-US" sz="1200" kern="0" spc="264" dirty="0">
                 <a:solidFill>
                   <a:srgbClr val="969696"/>
                 </a:solidFill>
@@ -7217,6 +6821,7 @@
         <a:solidFill>
           <a:srgbClr val="000000"/>
         </a:solidFill>
+        <a:effectLst/>
       </p:bgPr>
     </p:bg>
     <p:spTree>
@@ -7256,11 +6861,11 @@
           </a:bodyPr>
           <a:lstStyle/>
           <a:p>
-            <a:pPr algn="l" indent="0" marL="0">
-              <a:buNone/>
-            </a:pPr>
-            <a:r>
-              <a:rPr lang="en-US" sz="1500" spc="450" kern="0" dirty="0">
+            <a:pPr marL="0" indent="0" algn="l">
+              <a:buNone/>
+            </a:pPr>
+            <a:r>
+              <a:rPr lang="en-US" sz="1500" kern="0" spc="450" dirty="0">
                 <a:solidFill>
                   <a:srgbClr val="36CDFF"/>
                 </a:solidFill>
@@ -7297,7 +6902,7 @@
           </a:bodyPr>
           <a:lstStyle/>
           <a:p>
-            <a:pPr algn="l" indent="0" marL="0">
+            <a:pPr marL="0" indent="0" algn="l">
               <a:lnSpc>
                 <a:spcPct val="78261"/>
               </a:lnSpc>
@@ -7341,7 +6946,7 @@
           </a:bodyPr>
           <a:lstStyle/>
           <a:p>
-            <a:pPr algn="l" indent="0" marL="0">
+            <a:pPr marL="0" indent="0" algn="l">
               <a:lnSpc>
                 <a:spcPct val="126087"/>
               </a:lnSpc>
@@ -7385,7 +6990,7 @@
           </a:bodyPr>
           <a:lstStyle/>
           <a:p>
-            <a:pPr algn="l" indent="0" marL="0">
+            <a:pPr marL="0" indent="0" algn="l">
               <a:lnSpc>
                 <a:spcPct val="132000"/>
               </a:lnSpc>
@@ -7429,7 +7034,7 @@
           </a:bodyPr>
           <a:lstStyle/>
           <a:p>
-            <a:pPr algn="l" indent="0" marL="0">
+            <a:pPr marL="0" indent="0" algn="l">
               <a:lnSpc>
                 <a:spcPct val="121194"/>
               </a:lnSpc>
@@ -7446,7 +7051,100 @@
               </a:rPr>
               <a:t>Focus: </a:t>
             </a:r>
-            <a:pPr algn="l" indent="0" marL="0">
+            <a:r>
+              <a:rPr lang="en-US" sz="2175" b="1" dirty="0">
+                <a:solidFill>
+                  <a:srgbClr val="FFFFFF"/>
+                </a:solidFill>
+                <a:latin typeface="Arial" pitchFamily="34" charset="0"/>
+                <a:ea typeface="Arial" pitchFamily="34" charset="-122"/>
+                <a:cs typeface="Arial" pitchFamily="34" charset="-120"/>
+              </a:rPr>
+              <a:t>AI security and adversarial AI</a:t>
+            </a:r>
+            <a:r>
+              <a:rPr lang="en-US" sz="2175" dirty="0">
+                <a:solidFill>
+                  <a:srgbClr val="FFFFFF"/>
+                </a:solidFill>
+                <a:latin typeface="Arial" pitchFamily="34" charset="0"/>
+                <a:ea typeface="Arial" pitchFamily="34" charset="-122"/>
+                <a:cs typeface="Arial" pitchFamily="34" charset="-120"/>
+              </a:rPr>
+              <a:t>, cloud security (AWS / Azure), compliance and audit.</a:t>
+            </a:r>
+            <a:endParaRPr lang="en-US" sz="2175" dirty="0"/>
+          </a:p>
+        </p:txBody>
+      </p:sp>
+      <p:sp>
+        <p:nvSpPr>
+          <p:cNvPr id="7" name="Text 5"/>
+          <p:cNvSpPr/>
+          <p:nvPr/>
+        </p:nvSpPr>
+        <p:spPr>
+          <a:xfrm>
+            <a:off x="990600" y="5580757"/>
+            <a:ext cx="202406" cy="352425"/>
+          </a:xfrm>
+          <a:prstGeom prst="rect">
+            <a:avLst/>
+          </a:prstGeom>
+          <a:noFill/>
+          <a:ln/>
+        </p:spPr>
+        <p:txBody>
+          <a:bodyPr wrap="square" lIns="25400" tIns="25400" rIns="25400" bIns="25400" rtlCol="0" anchor="t">
+            <a:normAutofit/>
+          </a:bodyPr>
+          <a:lstStyle/>
+          <a:p>
+            <a:pPr marL="0" indent="0" algn="l">
+              <a:lnSpc>
+                <a:spcPct val="132000"/>
+              </a:lnSpc>
+              <a:buNone/>
+            </a:pPr>
+            <a:r>
+              <a:rPr lang="en-US" sz="1650" dirty="0">
+                <a:solidFill>
+                  <a:srgbClr val="FD7EF5"/>
+                </a:solidFill>
+                <a:latin typeface="Courier New" pitchFamily="34" charset="0"/>
+                <a:ea typeface="Courier New" pitchFamily="34" charset="-122"/>
+                <a:cs typeface="Courier New" pitchFamily="34" charset="-120"/>
+              </a:rPr>
+              <a:t>▸</a:t>
+            </a:r>
+            <a:endParaRPr lang="en-US" sz="1650" dirty="0"/>
+          </a:p>
+        </p:txBody>
+      </p:sp>
+      <p:sp>
+        <p:nvSpPr>
+          <p:cNvPr id="8" name="Text 6"/>
+          <p:cNvSpPr/>
+          <p:nvPr/>
+        </p:nvSpPr>
+        <p:spPr>
+          <a:xfrm>
+            <a:off x="1307306" y="5580757"/>
+            <a:ext cx="6952067" cy="429518"/>
+          </a:xfrm>
+          <a:prstGeom prst="rect">
+            <a:avLst/>
+          </a:prstGeom>
+          <a:noFill/>
+          <a:ln/>
+        </p:spPr>
+        <p:txBody>
+          <a:bodyPr wrap="square" lIns="25400" tIns="25400" rIns="25400" bIns="25400" rtlCol="0" anchor="t">
+            <a:normAutofit/>
+          </a:bodyPr>
+          <a:lstStyle/>
+          <a:p>
+            <a:pPr marL="0" indent="0" algn="l">
               <a:lnSpc>
                 <a:spcPct val="121194"/>
               </a:lnSpc>
@@ -7461,9 +7159,80 @@
                 <a:ea typeface="Arial" pitchFamily="34" charset="-122"/>
                 <a:cs typeface="Arial" pitchFamily="34" charset="-120"/>
               </a:rPr>
-              <a:t>AI security and adversarial AI</a:t>
-            </a:r>
-            <a:pPr algn="l" indent="0" marL="0">
+              <a:t>CISSP · CISA · PCI QSA · Azure Security Engineer.</a:t>
+            </a:r>
+            <a:endParaRPr lang="en-US" sz="2175" dirty="0"/>
+          </a:p>
+        </p:txBody>
+      </p:sp>
+      <p:sp>
+        <p:nvSpPr>
+          <p:cNvPr id="9" name="Text 7"/>
+          <p:cNvSpPr/>
+          <p:nvPr/>
+        </p:nvSpPr>
+        <p:spPr>
+          <a:xfrm>
+            <a:off x="990600" y="6219825"/>
+            <a:ext cx="202406" cy="352425"/>
+          </a:xfrm>
+          <a:prstGeom prst="rect">
+            <a:avLst/>
+          </a:prstGeom>
+          <a:noFill/>
+          <a:ln/>
+        </p:spPr>
+        <p:txBody>
+          <a:bodyPr wrap="square" lIns="25400" tIns="25400" rIns="25400" bIns="25400" rtlCol="0" anchor="t">
+            <a:normAutofit/>
+          </a:bodyPr>
+          <a:lstStyle/>
+          <a:p>
+            <a:pPr marL="0" indent="0" algn="l">
+              <a:lnSpc>
+                <a:spcPct val="132000"/>
+              </a:lnSpc>
+              <a:buNone/>
+            </a:pPr>
+            <a:r>
+              <a:rPr lang="en-US" sz="1650" dirty="0">
+                <a:solidFill>
+                  <a:srgbClr val="FD7EF5"/>
+                </a:solidFill>
+                <a:latin typeface="Courier New" pitchFamily="34" charset="0"/>
+                <a:ea typeface="Courier New" pitchFamily="34" charset="-122"/>
+                <a:cs typeface="Courier New" pitchFamily="34" charset="-120"/>
+              </a:rPr>
+              <a:t>▸</a:t>
+            </a:r>
+            <a:endParaRPr lang="en-US" sz="1650" dirty="0"/>
+          </a:p>
+        </p:txBody>
+      </p:sp>
+      <p:sp>
+        <p:nvSpPr>
+          <p:cNvPr id="10" name="Text 8"/>
+          <p:cNvSpPr/>
+          <p:nvPr/>
+        </p:nvSpPr>
+        <p:spPr>
+          <a:xfrm>
+            <a:off x="1307306" y="6219825"/>
+            <a:ext cx="11679875" cy="424755"/>
+          </a:xfrm>
+          <a:prstGeom prst="rect">
+            <a:avLst/>
+          </a:prstGeom>
+          <a:noFill/>
+          <a:ln/>
+        </p:spPr>
+        <p:txBody>
+          <a:bodyPr wrap="square" lIns="25400" tIns="25400" rIns="25400" bIns="25400" rtlCol="0" anchor="t">
+            <a:normAutofit/>
+          </a:bodyPr>
+          <a:lstStyle/>
+          <a:p>
+            <a:pPr marL="0" indent="0" algn="l">
               <a:lnSpc>
                 <a:spcPct val="121194"/>
               </a:lnSpc>
@@ -7478,7 +7247,7 @@
                 <a:ea typeface="Arial" pitchFamily="34" charset="-122"/>
                 <a:cs typeface="Arial" pitchFamily="34" charset="-120"/>
               </a:rPr>
-              <a:t>, cloud security (AWS / Azure), compliance and audit.</a:t>
+              <a:t>Builds open security tooling — e.g. Project Shasta, AWS/Azure compliance automation.</a:t>
             </a:r>
             <a:endParaRPr lang="en-US" sz="2175" dirty="0"/>
           </a:p>
@@ -7486,13 +7255,13 @@
       </p:sp>
       <p:sp>
         <p:nvSpPr>
-          <p:cNvPr id="7" name="Text 5"/>
-          <p:cNvSpPr/>
-          <p:nvPr/>
-        </p:nvSpPr>
-        <p:spPr>
-          <a:xfrm>
-            <a:off x="990600" y="5580757"/>
+          <p:cNvPr id="11" name="Text 9"/>
+          <p:cNvSpPr/>
+          <p:nvPr/>
+        </p:nvSpPr>
+        <p:spPr>
+          <a:xfrm>
+            <a:off x="990600" y="6854130"/>
             <a:ext cx="202406" cy="352425"/>
           </a:xfrm>
           <a:prstGeom prst="rect">
@@ -7507,7 +7276,7 @@
           </a:bodyPr>
           <a:lstStyle/>
           <a:p>
-            <a:pPr algn="l" indent="0" marL="0">
+            <a:pPr marL="0" indent="0" algn="l">
               <a:lnSpc>
                 <a:spcPct val="132000"/>
               </a:lnSpc>
@@ -7530,218 +7299,42 @@
       </p:sp>
       <p:sp>
         <p:nvSpPr>
-          <p:cNvPr id="8" name="Text 6"/>
-          <p:cNvSpPr/>
-          <p:nvPr/>
-        </p:nvSpPr>
-        <p:spPr>
-          <a:xfrm>
-            <a:off x="1307306" y="5580757"/>
-            <a:ext cx="6952067" cy="429518"/>
-          </a:xfrm>
-          <a:prstGeom prst="rect">
-            <a:avLst/>
-          </a:prstGeom>
-          <a:noFill/>
-          <a:ln/>
-        </p:spPr>
-        <p:txBody>
-          <a:bodyPr wrap="square" lIns="25400" tIns="25400" rIns="25400" bIns="25400" rtlCol="0" anchor="t">
-            <a:normAutofit/>
-          </a:bodyPr>
-          <a:lstStyle/>
-          <a:p>
-            <a:pPr algn="l" indent="0" marL="0">
+          <p:cNvPr id="12" name="Text 10"/>
+          <p:cNvSpPr/>
+          <p:nvPr/>
+        </p:nvSpPr>
+        <p:spPr>
+          <a:xfrm>
+            <a:off x="1307306" y="6854130"/>
+            <a:ext cx="4086225" cy="424755"/>
+          </a:xfrm>
+          <a:prstGeom prst="rect">
+            <a:avLst/>
+          </a:prstGeom>
+          <a:noFill/>
+          <a:ln/>
+        </p:spPr>
+        <p:txBody>
+          <a:bodyPr wrap="square" lIns="25400" tIns="25400" rIns="25400" bIns="25400" rtlCol="0" anchor="t">
+            <a:normAutofit/>
+          </a:bodyPr>
+          <a:lstStyle/>
+          <a:p>
+            <a:pPr marL="0" indent="0" algn="l">
               <a:lnSpc>
                 <a:spcPct val="121194"/>
               </a:lnSpc>
               <a:buNone/>
             </a:pPr>
             <a:r>
-              <a:rPr lang="en-US" sz="2175" b="1" dirty="0">
-                <a:solidFill>
-                  <a:srgbClr val="FFFFFF"/>
-                </a:solidFill>
-                <a:latin typeface="Arial" pitchFamily="34" charset="0"/>
-                <a:ea typeface="Arial" pitchFamily="34" charset="-122"/>
-                <a:cs typeface="Arial" pitchFamily="34" charset="-120"/>
-              </a:rPr>
-              <a:t>CISSP · CISA · PCI QSA · Azure Security Engineer.</a:t>
-            </a:r>
-            <a:endParaRPr lang="en-US" sz="2175" dirty="0"/>
-          </a:p>
-        </p:txBody>
-      </p:sp>
-      <p:sp>
-        <p:nvSpPr>
-          <p:cNvPr id="9" name="Text 7"/>
-          <p:cNvSpPr/>
-          <p:nvPr/>
-        </p:nvSpPr>
-        <p:spPr>
-          <a:xfrm>
-            <a:off x="990600" y="6219825"/>
-            <a:ext cx="202406" cy="352425"/>
-          </a:xfrm>
-          <a:prstGeom prst="rect">
-            <a:avLst/>
-          </a:prstGeom>
-          <a:noFill/>
-          <a:ln/>
-        </p:spPr>
-        <p:txBody>
-          <a:bodyPr wrap="square" lIns="25400" tIns="25400" rIns="25400" bIns="25400" rtlCol="0" anchor="t">
-            <a:normAutofit/>
-          </a:bodyPr>
-          <a:lstStyle/>
-          <a:p>
-            <a:pPr algn="l" indent="0" marL="0">
-              <a:lnSpc>
-                <a:spcPct val="132000"/>
-              </a:lnSpc>
-              <a:buNone/>
-            </a:pPr>
-            <a:r>
-              <a:rPr lang="en-US" sz="1650" dirty="0">
-                <a:solidFill>
-                  <a:srgbClr val="FD7EF5"/>
+              <a:rPr lang="en-US" sz="1950" dirty="0">
+                <a:solidFill>
+                  <a:srgbClr val="C8C8C8"/>
                 </a:solidFill>
                 <a:latin typeface="Courier New" pitchFamily="34" charset="0"/>
                 <a:ea typeface="Courier New" pitchFamily="34" charset="-122"/>
                 <a:cs typeface="Courier New" pitchFamily="34" charset="-120"/>
               </a:rPr>
-              <a:t>▸</a:t>
-            </a:r>
-            <a:endParaRPr lang="en-US" sz="1650" dirty="0"/>
-          </a:p>
-        </p:txBody>
-      </p:sp>
-      <p:sp>
-        <p:nvSpPr>
-          <p:cNvPr id="10" name="Text 8"/>
-          <p:cNvSpPr/>
-          <p:nvPr/>
-        </p:nvSpPr>
-        <p:spPr>
-          <a:xfrm>
-            <a:off x="1307306" y="6219825"/>
-            <a:ext cx="11679875" cy="424755"/>
-          </a:xfrm>
-          <a:prstGeom prst="rect">
-            <a:avLst/>
-          </a:prstGeom>
-          <a:noFill/>
-          <a:ln/>
-        </p:spPr>
-        <p:txBody>
-          <a:bodyPr wrap="square" lIns="25400" tIns="25400" rIns="25400" bIns="25400" rtlCol="0" anchor="t">
-            <a:normAutofit/>
-          </a:bodyPr>
-          <a:lstStyle/>
-          <a:p>
-            <a:pPr algn="l" indent="0" marL="0">
-              <a:lnSpc>
-                <a:spcPct val="121194"/>
-              </a:lnSpc>
-              <a:buNone/>
-            </a:pPr>
-            <a:r>
-              <a:rPr lang="en-US" sz="2175" dirty="0">
-                <a:solidFill>
-                  <a:srgbClr val="FFFFFF"/>
-                </a:solidFill>
-                <a:latin typeface="Arial" pitchFamily="34" charset="0"/>
-                <a:ea typeface="Arial" pitchFamily="34" charset="-122"/>
-                <a:cs typeface="Arial" pitchFamily="34" charset="-120"/>
-              </a:rPr>
-              <a:t>Builds open security tooling — e.g. Project Shasta, AWS/Azure compliance automation.</a:t>
-            </a:r>
-            <a:endParaRPr lang="en-US" sz="2175" dirty="0"/>
-          </a:p>
-        </p:txBody>
-      </p:sp>
-      <p:sp>
-        <p:nvSpPr>
-          <p:cNvPr id="11" name="Text 9"/>
-          <p:cNvSpPr/>
-          <p:nvPr/>
-        </p:nvSpPr>
-        <p:spPr>
-          <a:xfrm>
-            <a:off x="990600" y="6854130"/>
-            <a:ext cx="202406" cy="352425"/>
-          </a:xfrm>
-          <a:prstGeom prst="rect">
-            <a:avLst/>
-          </a:prstGeom>
-          <a:noFill/>
-          <a:ln/>
-        </p:spPr>
-        <p:txBody>
-          <a:bodyPr wrap="square" lIns="25400" tIns="25400" rIns="25400" bIns="25400" rtlCol="0" anchor="t">
-            <a:normAutofit/>
-          </a:bodyPr>
-          <a:lstStyle/>
-          <a:p>
-            <a:pPr algn="l" indent="0" marL="0">
-              <a:lnSpc>
-                <a:spcPct val="132000"/>
-              </a:lnSpc>
-              <a:buNone/>
-            </a:pPr>
-            <a:r>
-              <a:rPr lang="en-US" sz="1650" dirty="0">
-                <a:solidFill>
-                  <a:srgbClr val="FD7EF5"/>
-                </a:solidFill>
-                <a:latin typeface="Courier New" pitchFamily="34" charset="0"/>
-                <a:ea typeface="Courier New" pitchFamily="34" charset="-122"/>
-                <a:cs typeface="Courier New" pitchFamily="34" charset="-120"/>
-              </a:rPr>
-              <a:t>▸</a:t>
-            </a:r>
-            <a:endParaRPr lang="en-US" sz="1650" dirty="0"/>
-          </a:p>
-        </p:txBody>
-      </p:sp>
-      <p:sp>
-        <p:nvSpPr>
-          <p:cNvPr id="12" name="Text 10"/>
-          <p:cNvSpPr/>
-          <p:nvPr/>
-        </p:nvSpPr>
-        <p:spPr>
-          <a:xfrm>
-            <a:off x="1307306" y="6854130"/>
-            <a:ext cx="4086225" cy="424755"/>
-          </a:xfrm>
-          <a:prstGeom prst="rect">
-            <a:avLst/>
-          </a:prstGeom>
-          <a:noFill/>
-          <a:ln/>
-        </p:spPr>
-        <p:txBody>
-          <a:bodyPr wrap="square" lIns="25400" tIns="25400" rIns="25400" bIns="25400" rtlCol="0" anchor="t">
-            <a:normAutofit/>
-          </a:bodyPr>
-          <a:lstStyle/>
-          <a:p>
-            <a:pPr algn="l" indent="0" marL="0">
-              <a:lnSpc>
-                <a:spcPct val="121194"/>
-              </a:lnSpc>
-              <a:buNone/>
-            </a:pPr>
-            <a:r>
-              <a:rPr lang="en-US" sz="1950" dirty="0">
-                <a:solidFill>
-                  <a:srgbClr val="C8C8C8"/>
-                </a:solidFill>
-                <a:latin typeface="Courier New" pitchFamily="34" charset="0"/>
-                <a:ea typeface="Courier New" pitchFamily="34" charset="-122"/>
-                <a:cs typeface="Courier New" pitchFamily="34" charset="-120"/>
-              </a:rPr>
               <a:t>linkedin.com/in/kkmookhey</a:t>
             </a:r>
             <a:endParaRPr lang="en-US" sz="1950" dirty="0"/>
@@ -7750,14 +7343,14 @@
       </p:sp>
       <p:pic>
         <p:nvPicPr>
-          <p:cNvPr id="13" name="Image 0" descr="preencoded.png">    </p:cNvPr>
+          <p:cNvPr id="13" name="Image 0" descr="preencoded.png"/>
           <p:cNvPicPr>
             <a:picLocks noChangeAspect="1"/>
           </p:cNvPicPr>
           <p:nvPr/>
         </p:nvPicPr>
         <p:blipFill>
-          <a:blip r:embed="rId1"/>
+          <a:blip r:embed="rId3"/>
           <a:stretch>
             <a:fillRect/>
           </a:stretch>
@@ -7795,11 +7388,11 @@
           </a:bodyPr>
           <a:lstStyle/>
           <a:p>
-            <a:pPr algn="l" indent="0" marL="0">
-              <a:buNone/>
-            </a:pPr>
-            <a:r>
-              <a:rPr lang="en-US" sz="1200" spc="264" kern="0" dirty="0">
+            <a:pPr marL="0" indent="0" algn="l">
+              <a:buNone/>
+            </a:pPr>
+            <a:r>
+              <a:rPr lang="en-US" sz="1200" kern="0" spc="264" dirty="0">
                 <a:solidFill>
                   <a:srgbClr val="969696"/>
                 </a:solidFill>
@@ -7829,6 +7422,7 @@
         <a:solidFill>
           <a:srgbClr val="000000"/>
         </a:solidFill>
+        <a:effectLst/>
       </p:bgPr>
     </p:bg>
     <p:spTree>
@@ -7868,11 +7462,11 @@
           </a:bodyPr>
           <a:lstStyle/>
           <a:p>
-            <a:pPr algn="l" indent="0" marL="0">
-              <a:buNone/>
-            </a:pPr>
-            <a:r>
-              <a:rPr lang="en-US" sz="1500" spc="450" kern="0" dirty="0">
+            <a:pPr marL="0" indent="0" algn="l">
+              <a:buNone/>
+            </a:pPr>
+            <a:r>
+              <a:rPr lang="en-US" sz="1500" kern="0" spc="450" dirty="0">
                 <a:solidFill>
                   <a:srgbClr val="36CDFF"/>
                 </a:solidFill>
@@ -7909,7 +7503,7 @@
           </a:bodyPr>
           <a:lstStyle/>
           <a:p>
-            <a:pPr algn="l" indent="0" marL="0">
+            <a:pPr marL="0" indent="0" algn="l">
               <a:lnSpc>
                 <a:spcPct val="78261"/>
               </a:lnSpc>
@@ -7953,7 +7547,7 @@
           </a:bodyPr>
           <a:lstStyle/>
           <a:p>
-            <a:pPr algn="l" indent="0" marL="0">
+            <a:pPr marL="0" indent="0" algn="l">
               <a:lnSpc>
                 <a:spcPct val="126087"/>
               </a:lnSpc>
@@ -7968,7 +7562,7 @@
                 <a:ea typeface="Arial" pitchFamily="34" charset="-122"/>
                 <a:cs typeface="Arial" pitchFamily="34" charset="-120"/>
               </a:rPr>
-              <a:t>Founder and CISO, Transilience AI — building at the intersection of generative AI, cloud and security.</a:t>
+              <a:t>Founder, Transilience AI — building at the intersection of generative AI, cloud and security.</a:t>
             </a:r>
             <a:endParaRPr lang="en-US" sz="2250" dirty="0"/>
           </a:p>
@@ -7997,7 +7591,7 @@
           </a:bodyPr>
           <a:lstStyle/>
           <a:p>
-            <a:pPr algn="l" indent="0" marL="0">
+            <a:pPr marL="0" indent="0" algn="l">
               <a:lnSpc>
                 <a:spcPct val="132000"/>
               </a:lnSpc>
@@ -8037,11 +7631,11 @@
         </p:spPr>
         <p:txBody>
           <a:bodyPr wrap="square" lIns="25400" tIns="25400" rIns="25400" bIns="25400" rtlCol="0" anchor="t">
-            <a:normAutofit/>
-          </a:bodyPr>
-          <a:lstStyle/>
-          <a:p>
-            <a:pPr algn="l" indent="0" marL="0">
+            <a:normAutofit lnSpcReduction="10000"/>
+          </a:bodyPr>
+          <a:lstStyle/>
+          <a:p>
+            <a:pPr marL="0" indent="0" algn="l">
               <a:lnSpc>
                 <a:spcPct val="121194"/>
               </a:lnSpc>
@@ -8058,13 +7652,161 @@
               </a:rPr>
               <a:t>Two decades in security engineering and product: </a:t>
             </a:r>
-            <a:pPr algn="l" indent="0" marL="0">
+            <a:r>
+              <a:rPr lang="en-US" sz="2175" b="1" dirty="0">
+                <a:solidFill>
+                  <a:srgbClr val="FFFFFF"/>
+                </a:solidFill>
+                <a:latin typeface="Arial" pitchFamily="34" charset="0"/>
+                <a:ea typeface="Arial" pitchFamily="34" charset="-122"/>
+                <a:cs typeface="Arial" pitchFamily="34" charset="-120"/>
+              </a:rPr>
+              <a:t>Cisco </a:t>
+            </a:r>
+            <a:r>
+              <a:rPr lang="en-US" sz="2175" dirty="0">
+                <a:solidFill>
+                  <a:srgbClr val="FFFFFF"/>
+                </a:solidFill>
+                <a:latin typeface="Arial" pitchFamily="34" charset="0"/>
+                <a:ea typeface="Arial" pitchFamily="34" charset="-122"/>
+                <a:cs typeface="Arial" pitchFamily="34" charset="-120"/>
+              </a:rPr>
+              <a:t>(product manager, Infrastructure Security Services Group), </a:t>
+            </a:r>
+            <a:r>
+              <a:rPr lang="en-US" sz="2175" b="1" dirty="0">
+                <a:solidFill>
+                  <a:srgbClr val="FFFFFF"/>
+                </a:solidFill>
+                <a:latin typeface="Arial" pitchFamily="34" charset="0"/>
+                <a:ea typeface="Arial" pitchFamily="34" charset="-122"/>
+                <a:cs typeface="Arial" pitchFamily="34" charset="-120"/>
+              </a:rPr>
+              <a:t>Threat Stack</a:t>
+            </a:r>
+            <a:r>
+              <a:rPr lang="en-US" sz="2175" dirty="0">
+                <a:solidFill>
+                  <a:srgbClr val="FFFFFF"/>
+                </a:solidFill>
+                <a:latin typeface="Arial" pitchFamily="34" charset="0"/>
+                <a:ea typeface="Arial" pitchFamily="34" charset="-122"/>
+                <a:cs typeface="Arial" pitchFamily="34" charset="-120"/>
+              </a:rPr>
+              <a:t>, </a:t>
+            </a:r>
+            <a:r>
+              <a:rPr lang="en-US" sz="2175" b="1" dirty="0">
+                <a:solidFill>
+                  <a:srgbClr val="FFFFFF"/>
+                </a:solidFill>
+                <a:latin typeface="Arial" pitchFamily="34" charset="0"/>
+                <a:ea typeface="Arial" pitchFamily="34" charset="-122"/>
+                <a:cs typeface="Arial" pitchFamily="34" charset="-120"/>
+              </a:rPr>
+              <a:t>Cofense</a:t>
+            </a:r>
+            <a:r>
+              <a:rPr lang="en-US" sz="2175" dirty="0">
+                <a:solidFill>
+                  <a:srgbClr val="FFFFFF"/>
+                </a:solidFill>
+                <a:latin typeface="Arial" pitchFamily="34" charset="0"/>
+                <a:ea typeface="Arial" pitchFamily="34" charset="-122"/>
+                <a:cs typeface="Arial" pitchFamily="34" charset="-120"/>
+              </a:rPr>
+              <a:t>.</a:t>
+            </a:r>
+            <a:endParaRPr lang="en-US" sz="2175" dirty="0"/>
+          </a:p>
+        </p:txBody>
+      </p:sp>
+      <p:sp>
+        <p:nvSpPr>
+          <p:cNvPr id="7" name="Text 5"/>
+          <p:cNvSpPr/>
+          <p:nvPr/>
+        </p:nvSpPr>
+        <p:spPr>
+          <a:xfrm>
+            <a:off x="990600" y="5578376"/>
+            <a:ext cx="202406" cy="352425"/>
+          </a:xfrm>
+          <a:prstGeom prst="rect">
+            <a:avLst/>
+          </a:prstGeom>
+          <a:noFill/>
+          <a:ln/>
+        </p:spPr>
+        <p:txBody>
+          <a:bodyPr wrap="square" lIns="25400" tIns="25400" rIns="25400" bIns="25400" rtlCol="0" anchor="t">
+            <a:normAutofit/>
+          </a:bodyPr>
+          <a:lstStyle/>
+          <a:p>
+            <a:pPr marL="0" indent="0" algn="l">
+              <a:lnSpc>
+                <a:spcPct val="132000"/>
+              </a:lnSpc>
+              <a:buNone/>
+            </a:pPr>
+            <a:r>
+              <a:rPr lang="en-US" sz="1650" dirty="0">
+                <a:solidFill>
+                  <a:srgbClr val="FD7EF5"/>
+                </a:solidFill>
+                <a:latin typeface="Courier New" pitchFamily="34" charset="0"/>
+                <a:ea typeface="Courier New" pitchFamily="34" charset="-122"/>
+                <a:cs typeface="Courier New" pitchFamily="34" charset="-120"/>
+              </a:rPr>
+              <a:t>▸</a:t>
+            </a:r>
+            <a:endParaRPr lang="en-US" sz="1650" dirty="0"/>
+          </a:p>
+        </p:txBody>
+      </p:sp>
+      <p:sp>
+        <p:nvSpPr>
+          <p:cNvPr id="8" name="Text 6"/>
+          <p:cNvSpPr/>
+          <p:nvPr/>
+        </p:nvSpPr>
+        <p:spPr>
+          <a:xfrm>
+            <a:off x="1307306" y="5578376"/>
+            <a:ext cx="16509266" cy="429518"/>
+          </a:xfrm>
+          <a:prstGeom prst="rect">
+            <a:avLst/>
+          </a:prstGeom>
+          <a:noFill/>
+          <a:ln/>
+        </p:spPr>
+        <p:txBody>
+          <a:bodyPr wrap="square" lIns="25400" tIns="25400" rIns="25400" bIns="25400" rtlCol="0" anchor="t">
+            <a:normAutofit/>
+          </a:bodyPr>
+          <a:lstStyle/>
+          <a:p>
+            <a:pPr marL="0" indent="0" algn="l">
               <a:lnSpc>
                 <a:spcPct val="121194"/>
               </a:lnSpc>
               <a:buNone/>
             </a:pPr>
             <a:r>
+              <a:rPr lang="en-US" sz="2175" dirty="0">
+                <a:solidFill>
+                  <a:srgbClr val="FFFFFF"/>
+                </a:solidFill>
+                <a:latin typeface="Arial" pitchFamily="34" charset="0"/>
+                <a:ea typeface="Arial" pitchFamily="34" charset="-122"/>
+                <a:cs typeface="Arial" pitchFamily="34" charset="-120"/>
+              </a:rPr>
+              <a:t>Builds </a:t>
+            </a:r>
+            <a:r>
               <a:rPr lang="en-US" sz="2175" b="1" dirty="0">
                 <a:solidFill>
                   <a:srgbClr val="FFFFFF"/>
@@ -8073,9 +7815,91 @@
                 <a:ea typeface="Arial" pitchFamily="34" charset="-122"/>
                 <a:cs typeface="Arial" pitchFamily="34" charset="-120"/>
               </a:rPr>
-              <a:t>Cisco </a:t>
-            </a:r>
-            <a:pPr algn="l" indent="0" marL="0">
+              <a:t>autonomous security agents </a:t>
+            </a:r>
+            <a:r>
+              <a:rPr lang="en-US" sz="2175" dirty="0">
+                <a:solidFill>
+                  <a:srgbClr val="FFFFFF"/>
+                </a:solidFill>
+                <a:latin typeface="Arial" pitchFamily="34" charset="0"/>
+                <a:ea typeface="Arial" pitchFamily="34" charset="-122"/>
+                <a:cs typeface="Arial" pitchFamily="34" charset="-120"/>
+              </a:rPr>
+              <a:t>— Transilience ships agentic pentest, vulnerability and compliance agents in production.</a:t>
+            </a:r>
+            <a:endParaRPr lang="en-US" sz="2175" dirty="0"/>
+          </a:p>
+        </p:txBody>
+      </p:sp>
+      <p:sp>
+        <p:nvSpPr>
+          <p:cNvPr id="9" name="Text 7"/>
+          <p:cNvSpPr/>
+          <p:nvPr/>
+        </p:nvSpPr>
+        <p:spPr>
+          <a:xfrm>
+            <a:off x="990600" y="6217444"/>
+            <a:ext cx="202406" cy="352425"/>
+          </a:xfrm>
+          <a:prstGeom prst="rect">
+            <a:avLst/>
+          </a:prstGeom>
+          <a:noFill/>
+          <a:ln/>
+        </p:spPr>
+        <p:txBody>
+          <a:bodyPr wrap="square" lIns="25400" tIns="25400" rIns="25400" bIns="25400" rtlCol="0" anchor="t">
+            <a:normAutofit/>
+          </a:bodyPr>
+          <a:lstStyle/>
+          <a:p>
+            <a:pPr marL="0" indent="0" algn="l">
+              <a:lnSpc>
+                <a:spcPct val="132000"/>
+              </a:lnSpc>
+              <a:buNone/>
+            </a:pPr>
+            <a:r>
+              <a:rPr lang="en-US" sz="1650" dirty="0">
+                <a:solidFill>
+                  <a:srgbClr val="FD7EF5"/>
+                </a:solidFill>
+                <a:latin typeface="Courier New" pitchFamily="34" charset="0"/>
+                <a:ea typeface="Courier New" pitchFamily="34" charset="-122"/>
+                <a:cs typeface="Courier New" pitchFamily="34" charset="-120"/>
+              </a:rPr>
+              <a:t>▸</a:t>
+            </a:r>
+            <a:endParaRPr lang="en-US" sz="1650" dirty="0"/>
+          </a:p>
+        </p:txBody>
+      </p:sp>
+      <p:sp>
+        <p:nvSpPr>
+          <p:cNvPr id="10" name="Text 8"/>
+          <p:cNvSpPr/>
+          <p:nvPr/>
+        </p:nvSpPr>
+        <p:spPr>
+          <a:xfrm>
+            <a:off x="1307306" y="6217444"/>
+            <a:ext cx="14459850" cy="424755"/>
+          </a:xfrm>
+          <a:prstGeom prst="rect">
+            <a:avLst/>
+          </a:prstGeom>
+          <a:noFill/>
+          <a:ln/>
+        </p:spPr>
+        <p:txBody>
+          <a:bodyPr wrap="square" lIns="25400" tIns="25400" rIns="25400" bIns="25400" rtlCol="0" anchor="t">
+            <a:normAutofit/>
+          </a:bodyPr>
+          <a:lstStyle/>
+          <a:p>
+            <a:pPr marL="0" indent="0" algn="l">
               <a:lnSpc>
                 <a:spcPct val="121194"/>
               </a:lnSpc>
@@ -8090,16 +7914,87 @@
                 <a:ea typeface="Arial" pitchFamily="34" charset="-122"/>
                 <a:cs typeface="Arial" pitchFamily="34" charset="-120"/>
               </a:rPr>
-              <a:t>(product manager, Infrastructure Security Services Group), </a:t>
-            </a:r>
-            <a:pPr algn="l" indent="0" marL="0">
+              <a:t>Writes and speaks on LLM agent architectures, RAG for security, and the economics of agentic security work.</a:t>
+            </a:r>
+            <a:endParaRPr lang="en-US" sz="2175" dirty="0"/>
+          </a:p>
+        </p:txBody>
+      </p:sp>
+      <p:sp>
+        <p:nvSpPr>
+          <p:cNvPr id="11" name="Text 9"/>
+          <p:cNvSpPr/>
+          <p:nvPr/>
+        </p:nvSpPr>
+        <p:spPr>
+          <a:xfrm>
+            <a:off x="990600" y="6851749"/>
+            <a:ext cx="202406" cy="352425"/>
+          </a:xfrm>
+          <a:prstGeom prst="rect">
+            <a:avLst/>
+          </a:prstGeom>
+          <a:noFill/>
+          <a:ln/>
+        </p:spPr>
+        <p:txBody>
+          <a:bodyPr wrap="square" lIns="25400" tIns="25400" rIns="25400" bIns="25400" rtlCol="0" anchor="t">
+            <a:normAutofit/>
+          </a:bodyPr>
+          <a:lstStyle/>
+          <a:p>
+            <a:pPr marL="0" indent="0" algn="l">
+              <a:lnSpc>
+                <a:spcPct val="132000"/>
+              </a:lnSpc>
+              <a:buNone/>
+            </a:pPr>
+            <a:r>
+              <a:rPr lang="en-US" sz="1650" dirty="0">
+                <a:solidFill>
+                  <a:srgbClr val="FD7EF5"/>
+                </a:solidFill>
+                <a:latin typeface="Courier New" pitchFamily="34" charset="0"/>
+                <a:ea typeface="Courier New" pitchFamily="34" charset="-122"/>
+                <a:cs typeface="Courier New" pitchFamily="34" charset="-120"/>
+              </a:rPr>
+              <a:t>▸</a:t>
+            </a:r>
+            <a:endParaRPr lang="en-US" sz="1650" dirty="0"/>
+          </a:p>
+        </p:txBody>
+      </p:sp>
+      <p:sp>
+        <p:nvSpPr>
+          <p:cNvPr id="12" name="Text 10"/>
+          <p:cNvSpPr/>
+          <p:nvPr/>
+        </p:nvSpPr>
+        <p:spPr>
+          <a:xfrm>
+            <a:off x="1307306" y="6851749"/>
+            <a:ext cx="5265926" cy="424755"/>
+          </a:xfrm>
+          <a:prstGeom prst="rect">
+            <a:avLst/>
+          </a:prstGeom>
+          <a:noFill/>
+          <a:ln/>
+        </p:spPr>
+        <p:txBody>
+          <a:bodyPr wrap="square" lIns="25400" tIns="25400" rIns="25400" bIns="25400" rtlCol="0" anchor="t">
+            <a:normAutofit/>
+          </a:bodyPr>
+          <a:lstStyle/>
+          <a:p>
+            <a:pPr marL="0" indent="0" algn="l">
               <a:lnSpc>
                 <a:spcPct val="121194"/>
               </a:lnSpc>
               <a:buNone/>
             </a:pPr>
             <a:r>
-              <a:rPr lang="en-US" sz="2175" b="1" dirty="0">
+              <a:rPr lang="en-US" sz="2175" dirty="0">
                 <a:solidFill>
                   <a:srgbClr val="FFFFFF"/>
                 </a:solidFill>
@@ -8107,534 +8002,110 @@
                 <a:ea typeface="Arial" pitchFamily="34" charset="-122"/>
                 <a:cs typeface="Arial" pitchFamily="34" charset="-120"/>
               </a:rPr>
-              <a:t>Lockheed Martin </a:t>
-            </a:r>
-            <a:pPr algn="l" indent="0" marL="0">
+              <a:t>MBA, The University of Texas at Austin.</a:t>
+            </a:r>
+            <a:endParaRPr lang="en-US" sz="2175" dirty="0"/>
+          </a:p>
+        </p:txBody>
+      </p:sp>
+      <p:sp>
+        <p:nvSpPr>
+          <p:cNvPr id="13" name="Text 11"/>
+          <p:cNvSpPr/>
+          <p:nvPr/>
+        </p:nvSpPr>
+        <p:spPr>
+          <a:xfrm>
+            <a:off x="990600" y="7486055"/>
+            <a:ext cx="202406" cy="352425"/>
+          </a:xfrm>
+          <a:prstGeom prst="rect">
+            <a:avLst/>
+          </a:prstGeom>
+          <a:noFill/>
+          <a:ln/>
+        </p:spPr>
+        <p:txBody>
+          <a:bodyPr wrap="square" lIns="25400" tIns="25400" rIns="25400" bIns="25400" rtlCol="0" anchor="t">
+            <a:normAutofit/>
+          </a:bodyPr>
+          <a:lstStyle/>
+          <a:p>
+            <a:pPr marL="0" indent="0" algn="l">
+              <a:lnSpc>
+                <a:spcPct val="132000"/>
+              </a:lnSpc>
+              <a:buNone/>
+            </a:pPr>
+            <a:r>
+              <a:rPr lang="en-US" sz="1650" dirty="0">
+                <a:solidFill>
+                  <a:srgbClr val="FD7EF5"/>
+                </a:solidFill>
+                <a:latin typeface="Courier New" pitchFamily="34" charset="0"/>
+                <a:ea typeface="Courier New" pitchFamily="34" charset="-122"/>
+                <a:cs typeface="Courier New" pitchFamily="34" charset="-120"/>
+              </a:rPr>
+              <a:t>▸</a:t>
+            </a:r>
+            <a:endParaRPr lang="en-US" sz="1650" dirty="0"/>
+          </a:p>
+        </p:txBody>
+      </p:sp>
+      <p:sp>
+        <p:nvSpPr>
+          <p:cNvPr id="14" name="Text 12"/>
+          <p:cNvSpPr/>
+          <p:nvPr/>
+        </p:nvSpPr>
+        <p:spPr>
+          <a:xfrm>
+            <a:off x="1307306" y="7486055"/>
+            <a:ext cx="5393866" cy="424755"/>
+          </a:xfrm>
+          <a:prstGeom prst="rect">
+            <a:avLst/>
+          </a:prstGeom>
+          <a:noFill/>
+          <a:ln/>
+        </p:spPr>
+        <p:txBody>
+          <a:bodyPr wrap="square" lIns="25400" tIns="25400" rIns="25400" bIns="25400" rtlCol="0" anchor="t">
+            <a:normAutofit/>
+          </a:bodyPr>
+          <a:lstStyle/>
+          <a:p>
+            <a:pPr marL="0" indent="0" algn="l">
               <a:lnSpc>
                 <a:spcPct val="121194"/>
               </a:lnSpc>
               <a:buNone/>
             </a:pPr>
             <a:r>
-              <a:rPr lang="en-US" sz="2175" dirty="0">
-                <a:solidFill>
-                  <a:srgbClr val="FFFFFF"/>
-                </a:solidFill>
-                <a:latin typeface="Arial" pitchFamily="34" charset="0"/>
-                <a:ea typeface="Arial" pitchFamily="34" charset="-122"/>
-                <a:cs typeface="Arial" pitchFamily="34" charset="-120"/>
-              </a:rPr>
-              <a:t>, </a:t>
-            </a:r>
-            <a:pPr algn="l" indent="0" marL="0">
-              <a:lnSpc>
-                <a:spcPct val="121194"/>
-              </a:lnSpc>
-              <a:buNone/>
-            </a:pPr>
-            <a:r>
-              <a:rPr lang="en-US" sz="2175" b="1" dirty="0">
-                <a:solidFill>
-                  <a:srgbClr val="FFFFFF"/>
-                </a:solidFill>
-                <a:latin typeface="Arial" pitchFamily="34" charset="0"/>
-                <a:ea typeface="Arial" pitchFamily="34" charset="-122"/>
-                <a:cs typeface="Arial" pitchFamily="34" charset="-120"/>
-              </a:rPr>
-              <a:t>Threat Stack</a:t>
-            </a:r>
-            <a:pPr algn="l" indent="0" marL="0">
-              <a:lnSpc>
-                <a:spcPct val="121194"/>
-              </a:lnSpc>
-              <a:buNone/>
-            </a:pPr>
-            <a:r>
-              <a:rPr lang="en-US" sz="2175" dirty="0">
-                <a:solidFill>
-                  <a:srgbClr val="FFFFFF"/>
-                </a:solidFill>
-                <a:latin typeface="Arial" pitchFamily="34" charset="0"/>
-                <a:ea typeface="Arial" pitchFamily="34" charset="-122"/>
-                <a:cs typeface="Arial" pitchFamily="34" charset="-120"/>
-              </a:rPr>
-              <a:t>, </a:t>
-            </a:r>
-            <a:pPr algn="l" indent="0" marL="0">
-              <a:lnSpc>
-                <a:spcPct val="121194"/>
-              </a:lnSpc>
-              <a:buNone/>
-            </a:pPr>
-            <a:r>
-              <a:rPr lang="en-US" sz="2175" b="1" dirty="0">
-                <a:solidFill>
-                  <a:srgbClr val="FFFFFF"/>
-                </a:solidFill>
-                <a:latin typeface="Arial" pitchFamily="34" charset="0"/>
-                <a:ea typeface="Arial" pitchFamily="34" charset="-122"/>
-                <a:cs typeface="Arial" pitchFamily="34" charset="-120"/>
-              </a:rPr>
-              <a:t>Cofense</a:t>
-            </a:r>
-            <a:pPr algn="l" indent="0" marL="0">
-              <a:lnSpc>
-                <a:spcPct val="121194"/>
-              </a:lnSpc>
-              <a:buNone/>
-            </a:pPr>
-            <a:r>
-              <a:rPr lang="en-US" sz="2175" dirty="0">
-                <a:solidFill>
-                  <a:srgbClr val="FFFFFF"/>
-                </a:solidFill>
-                <a:latin typeface="Arial" pitchFamily="34" charset="0"/>
-                <a:ea typeface="Arial" pitchFamily="34" charset="-122"/>
-                <a:cs typeface="Arial" pitchFamily="34" charset="-120"/>
-              </a:rPr>
-              <a:t>.</a:t>
-            </a:r>
-            <a:endParaRPr lang="en-US" sz="2175" dirty="0"/>
-          </a:p>
-        </p:txBody>
-      </p:sp>
-      <p:sp>
-        <p:nvSpPr>
-          <p:cNvPr id="7" name="Text 5"/>
-          <p:cNvSpPr/>
-          <p:nvPr/>
-        </p:nvSpPr>
-        <p:spPr>
-          <a:xfrm>
-            <a:off x="990600" y="5578376"/>
-            <a:ext cx="202406" cy="352425"/>
-          </a:xfrm>
-          <a:prstGeom prst="rect">
-            <a:avLst/>
-          </a:prstGeom>
-          <a:noFill/>
-          <a:ln/>
-        </p:spPr>
-        <p:txBody>
-          <a:bodyPr wrap="square" lIns="25400" tIns="25400" rIns="25400" bIns="25400" rtlCol="0" anchor="t">
-            <a:normAutofit/>
-          </a:bodyPr>
-          <a:lstStyle/>
-          <a:p>
-            <a:pPr algn="l" indent="0" marL="0">
-              <a:lnSpc>
-                <a:spcPct val="132000"/>
-              </a:lnSpc>
-              <a:buNone/>
-            </a:pPr>
-            <a:r>
-              <a:rPr lang="en-US" sz="1650" dirty="0">
-                <a:solidFill>
-                  <a:srgbClr val="FD7EF5"/>
+              <a:rPr lang="en-US" sz="1950" dirty="0">
+                <a:solidFill>
+                  <a:srgbClr val="C8C8C8"/>
                 </a:solidFill>
                 <a:latin typeface="Courier New" pitchFamily="34" charset="0"/>
                 <a:ea typeface="Courier New" pitchFamily="34" charset="-122"/>
                 <a:cs typeface="Courier New" pitchFamily="34" charset="-120"/>
               </a:rPr>
-              <a:t>▸</a:t>
-            </a:r>
-            <a:endParaRPr lang="en-US" sz="1650" dirty="0"/>
-          </a:p>
-        </p:txBody>
-      </p:sp>
-      <p:sp>
-        <p:nvSpPr>
-          <p:cNvPr id="8" name="Text 6"/>
-          <p:cNvSpPr/>
-          <p:nvPr/>
-        </p:nvSpPr>
-        <p:spPr>
-          <a:xfrm>
-            <a:off x="1307306" y="5578376"/>
-            <a:ext cx="16509266" cy="429518"/>
-          </a:xfrm>
-          <a:prstGeom prst="rect">
-            <a:avLst/>
-          </a:prstGeom>
-          <a:noFill/>
-          <a:ln/>
-        </p:spPr>
-        <p:txBody>
-          <a:bodyPr wrap="square" lIns="25400" tIns="25400" rIns="25400" bIns="25400" rtlCol="0" anchor="t">
-            <a:normAutofit/>
-          </a:bodyPr>
-          <a:lstStyle/>
-          <a:p>
-            <a:pPr algn="l" indent="0" marL="0">
-              <a:lnSpc>
-                <a:spcPct val="121194"/>
-              </a:lnSpc>
-              <a:buNone/>
-            </a:pPr>
-            <a:r>
-              <a:rPr lang="en-US" sz="2175" dirty="0">
-                <a:solidFill>
-                  <a:srgbClr val="FFFFFF"/>
-                </a:solidFill>
-                <a:latin typeface="Arial" pitchFamily="34" charset="0"/>
-                <a:ea typeface="Arial" pitchFamily="34" charset="-122"/>
-                <a:cs typeface="Arial" pitchFamily="34" charset="-120"/>
-              </a:rPr>
-              <a:t>Builds </a:t>
-            </a:r>
-            <a:pPr algn="l" indent="0" marL="0">
-              <a:lnSpc>
-                <a:spcPct val="121194"/>
-              </a:lnSpc>
-              <a:buNone/>
-            </a:pPr>
-            <a:r>
-              <a:rPr lang="en-US" sz="2175" b="1" dirty="0">
-                <a:solidFill>
-                  <a:srgbClr val="FFFFFF"/>
-                </a:solidFill>
-                <a:latin typeface="Arial" pitchFamily="34" charset="0"/>
-                <a:ea typeface="Arial" pitchFamily="34" charset="-122"/>
-                <a:cs typeface="Arial" pitchFamily="34" charset="-120"/>
-              </a:rPr>
-              <a:t>autonomous security agents </a:t>
-            </a:r>
-            <a:pPr algn="l" indent="0" marL="0">
-              <a:lnSpc>
-                <a:spcPct val="121194"/>
-              </a:lnSpc>
-              <a:buNone/>
-            </a:pPr>
-            <a:r>
-              <a:rPr lang="en-US" sz="2175" dirty="0">
-                <a:solidFill>
-                  <a:srgbClr val="FFFFFF"/>
-                </a:solidFill>
-                <a:latin typeface="Arial" pitchFamily="34" charset="0"/>
-                <a:ea typeface="Arial" pitchFamily="34" charset="-122"/>
-                <a:cs typeface="Arial" pitchFamily="34" charset="-120"/>
-              </a:rPr>
-              <a:t>— Transilience ships agentic pentest, vulnerability and compliance agents in production.</a:t>
-            </a:r>
-            <a:endParaRPr lang="en-US" sz="2175" dirty="0"/>
-          </a:p>
-        </p:txBody>
-      </p:sp>
-      <p:sp>
-        <p:nvSpPr>
-          <p:cNvPr id="9" name="Text 7"/>
-          <p:cNvSpPr/>
-          <p:nvPr/>
-        </p:nvSpPr>
-        <p:spPr>
-          <a:xfrm>
-            <a:off x="990600" y="6217444"/>
-            <a:ext cx="202406" cy="352425"/>
-          </a:xfrm>
-          <a:prstGeom prst="rect">
-            <a:avLst/>
-          </a:prstGeom>
-          <a:noFill/>
-          <a:ln/>
-        </p:spPr>
-        <p:txBody>
-          <a:bodyPr wrap="square" lIns="25400" tIns="25400" rIns="25400" bIns="25400" rtlCol="0" anchor="t">
-            <a:normAutofit/>
-          </a:bodyPr>
-          <a:lstStyle/>
-          <a:p>
-            <a:pPr algn="l" indent="0" marL="0">
-              <a:lnSpc>
-                <a:spcPct val="132000"/>
-              </a:lnSpc>
-              <a:buNone/>
-            </a:pPr>
-            <a:r>
-              <a:rPr lang="en-US" sz="1650" dirty="0">
-                <a:solidFill>
-                  <a:srgbClr val="FD7EF5"/>
-                </a:solidFill>
-                <a:latin typeface="Courier New" pitchFamily="34" charset="0"/>
-                <a:ea typeface="Courier New" pitchFamily="34" charset="-122"/>
-                <a:cs typeface="Courier New" pitchFamily="34" charset="-120"/>
-              </a:rPr>
-              <a:t>▸</a:t>
-            </a:r>
-            <a:endParaRPr lang="en-US" sz="1650" dirty="0"/>
-          </a:p>
-        </p:txBody>
-      </p:sp>
-      <p:sp>
-        <p:nvSpPr>
-          <p:cNvPr id="10" name="Text 8"/>
-          <p:cNvSpPr/>
-          <p:nvPr/>
-        </p:nvSpPr>
-        <p:spPr>
-          <a:xfrm>
-            <a:off x="1307306" y="6217444"/>
-            <a:ext cx="14459850" cy="424755"/>
-          </a:xfrm>
-          <a:prstGeom prst="rect">
-            <a:avLst/>
-          </a:prstGeom>
-          <a:noFill/>
-          <a:ln/>
-        </p:spPr>
-        <p:txBody>
-          <a:bodyPr wrap="square" lIns="25400" tIns="25400" rIns="25400" bIns="25400" rtlCol="0" anchor="t">
-            <a:normAutofit/>
-          </a:bodyPr>
-          <a:lstStyle/>
-          <a:p>
-            <a:pPr algn="l" indent="0" marL="0">
-              <a:lnSpc>
-                <a:spcPct val="121194"/>
-              </a:lnSpc>
-              <a:buNone/>
-            </a:pPr>
-            <a:r>
-              <a:rPr lang="en-US" sz="2175" dirty="0">
-                <a:solidFill>
-                  <a:srgbClr val="FFFFFF"/>
-                </a:solidFill>
-                <a:latin typeface="Arial" pitchFamily="34" charset="0"/>
-                <a:ea typeface="Arial" pitchFamily="34" charset="-122"/>
-                <a:cs typeface="Arial" pitchFamily="34" charset="-120"/>
-              </a:rPr>
-              <a:t>Writes and speaks on LLM agent architectures, RAG for security, and the economics of agentic security work.</a:t>
-            </a:r>
-            <a:endParaRPr lang="en-US" sz="2175" dirty="0"/>
-          </a:p>
-        </p:txBody>
-      </p:sp>
-      <p:sp>
-        <p:nvSpPr>
-          <p:cNvPr id="11" name="Text 9"/>
-          <p:cNvSpPr/>
-          <p:nvPr/>
-        </p:nvSpPr>
-        <p:spPr>
-          <a:xfrm>
-            <a:off x="990600" y="6851749"/>
-            <a:ext cx="202406" cy="352425"/>
-          </a:xfrm>
-          <a:prstGeom prst="rect">
-            <a:avLst/>
-          </a:prstGeom>
-          <a:noFill/>
-          <a:ln/>
-        </p:spPr>
-        <p:txBody>
-          <a:bodyPr wrap="square" lIns="25400" tIns="25400" rIns="25400" bIns="25400" rtlCol="0" anchor="t">
-            <a:normAutofit/>
-          </a:bodyPr>
-          <a:lstStyle/>
-          <a:p>
-            <a:pPr algn="l" indent="0" marL="0">
-              <a:lnSpc>
-                <a:spcPct val="132000"/>
-              </a:lnSpc>
-              <a:buNone/>
-            </a:pPr>
-            <a:r>
-              <a:rPr lang="en-US" sz="1650" dirty="0">
-                <a:solidFill>
-                  <a:srgbClr val="FD7EF5"/>
-                </a:solidFill>
-                <a:latin typeface="Courier New" pitchFamily="34" charset="0"/>
-                <a:ea typeface="Courier New" pitchFamily="34" charset="-122"/>
-                <a:cs typeface="Courier New" pitchFamily="34" charset="-120"/>
-              </a:rPr>
-              <a:t>▸</a:t>
-            </a:r>
-            <a:endParaRPr lang="en-US" sz="1650" dirty="0"/>
-          </a:p>
-        </p:txBody>
-      </p:sp>
-      <p:sp>
-        <p:nvSpPr>
-          <p:cNvPr id="12" name="Text 10"/>
-          <p:cNvSpPr/>
-          <p:nvPr/>
-        </p:nvSpPr>
-        <p:spPr>
-          <a:xfrm>
-            <a:off x="1307306" y="6851749"/>
-            <a:ext cx="5265926" cy="424755"/>
-          </a:xfrm>
-          <a:prstGeom prst="rect">
-            <a:avLst/>
-          </a:prstGeom>
-          <a:noFill/>
-          <a:ln/>
-        </p:spPr>
-        <p:txBody>
-          <a:bodyPr wrap="square" lIns="25400" tIns="25400" rIns="25400" bIns="25400" rtlCol="0" anchor="t">
-            <a:normAutofit/>
-          </a:bodyPr>
-          <a:lstStyle/>
-          <a:p>
-            <a:pPr algn="l" indent="0" marL="0">
-              <a:lnSpc>
-                <a:spcPct val="121194"/>
-              </a:lnSpc>
-              <a:buNone/>
-            </a:pPr>
-            <a:r>
-              <a:rPr lang="en-US" sz="2175" dirty="0">
-                <a:solidFill>
-                  <a:srgbClr val="FFFFFF"/>
-                </a:solidFill>
-                <a:latin typeface="Arial" pitchFamily="34" charset="0"/>
-                <a:ea typeface="Arial" pitchFamily="34" charset="-122"/>
-                <a:cs typeface="Arial" pitchFamily="34" charset="-120"/>
-              </a:rPr>
-              <a:t>MBA, The University of Texas at Austin.</a:t>
-            </a:r>
-            <a:endParaRPr lang="en-US" sz="2175" dirty="0"/>
-          </a:p>
-        </p:txBody>
-      </p:sp>
-      <p:sp>
-        <p:nvSpPr>
-          <p:cNvPr id="13" name="Text 11"/>
-          <p:cNvSpPr/>
-          <p:nvPr/>
-        </p:nvSpPr>
-        <p:spPr>
-          <a:xfrm>
-            <a:off x="990600" y="7486055"/>
-            <a:ext cx="202406" cy="352425"/>
-          </a:xfrm>
-          <a:prstGeom prst="rect">
-            <a:avLst/>
-          </a:prstGeom>
-          <a:noFill/>
-          <a:ln/>
-        </p:spPr>
-        <p:txBody>
-          <a:bodyPr wrap="square" lIns="25400" tIns="25400" rIns="25400" bIns="25400" rtlCol="0" anchor="t">
-            <a:normAutofit/>
-          </a:bodyPr>
-          <a:lstStyle/>
-          <a:p>
-            <a:pPr algn="l" indent="0" marL="0">
-              <a:lnSpc>
-                <a:spcPct val="132000"/>
-              </a:lnSpc>
-              <a:buNone/>
-            </a:pPr>
-            <a:r>
-              <a:rPr lang="en-US" sz="1650" dirty="0">
-                <a:solidFill>
-                  <a:srgbClr val="FD7EF5"/>
-                </a:solidFill>
-                <a:latin typeface="Courier New" pitchFamily="34" charset="0"/>
-                <a:ea typeface="Courier New" pitchFamily="34" charset="-122"/>
-                <a:cs typeface="Courier New" pitchFamily="34" charset="-120"/>
-              </a:rPr>
-              <a:t>▸</a:t>
-            </a:r>
-            <a:endParaRPr lang="en-US" sz="1650" dirty="0"/>
-          </a:p>
-        </p:txBody>
-      </p:sp>
-      <p:sp>
-        <p:nvSpPr>
-          <p:cNvPr id="14" name="Text 12"/>
-          <p:cNvSpPr/>
-          <p:nvPr/>
-        </p:nvSpPr>
-        <p:spPr>
-          <a:xfrm>
-            <a:off x="1307306" y="7486055"/>
-            <a:ext cx="5393866" cy="424755"/>
-          </a:xfrm>
-          <a:prstGeom prst="rect">
-            <a:avLst/>
-          </a:prstGeom>
-          <a:noFill/>
-          <a:ln/>
-        </p:spPr>
-        <p:txBody>
-          <a:bodyPr wrap="square" lIns="25400" tIns="25400" rIns="25400" bIns="25400" rtlCol="0" anchor="t">
-            <a:normAutofit/>
-          </a:bodyPr>
-          <a:lstStyle/>
-          <a:p>
-            <a:pPr algn="l" indent="0" marL="0">
-              <a:lnSpc>
-                <a:spcPct val="121194"/>
-              </a:lnSpc>
-              <a:buNone/>
-            </a:pPr>
-            <a:r>
-              <a:rPr lang="en-US" sz="1950" dirty="0">
-                <a:solidFill>
-                  <a:srgbClr val="C8C8C8"/>
-                </a:solidFill>
-                <a:latin typeface="Courier New" pitchFamily="34" charset="0"/>
-                <a:ea typeface="Courier New" pitchFamily="34" charset="-122"/>
-                <a:cs typeface="Courier New" pitchFamily="34" charset="-120"/>
-              </a:rPr>
               <a:t>linkedin.com/in/venkatpothamsetty</a:t>
             </a:r>
             <a:endParaRPr lang="en-US" sz="1950" dirty="0"/>
-          </a:p>
-        </p:txBody>
-      </p:sp>
-      <p:sp>
-        <p:nvSpPr>
-          <p:cNvPr id="15" name="Text 13"/>
-          <p:cNvSpPr/>
-          <p:nvPr/>
-        </p:nvSpPr>
-        <p:spPr>
-          <a:xfrm>
-            <a:off x="990600" y="8177510"/>
-            <a:ext cx="17937480" cy="266700"/>
-          </a:xfrm>
-          <a:prstGeom prst="rect">
-            <a:avLst/>
-          </a:prstGeom>
-          <a:noFill/>
-          <a:ln/>
-        </p:spPr>
-        <p:txBody>
-          <a:bodyPr wrap="square" lIns="25400" tIns="25400" rIns="25400" bIns="25400" rtlCol="0" anchor="t">
-            <a:normAutofit/>
-          </a:bodyPr>
-          <a:lstStyle/>
-          <a:p>
-            <a:pPr algn="l" indent="0" marL="0">
-              <a:buNone/>
-            </a:pPr>
-            <a:r>
-              <a:rPr lang="en-US" sz="1350" dirty="0">
-                <a:solidFill>
-                  <a:srgbClr val="969696"/>
-                </a:solidFill>
-                <a:latin typeface="Courier New" pitchFamily="34" charset="0"/>
-                <a:ea typeface="Courier New" pitchFamily="34" charset="-122"/>
-                <a:cs typeface="Courier New" pitchFamily="34" charset="-120"/>
-              </a:rPr>
-              <a:t>Compiled from public sources — transilience.ai, LinkedIn. Edit before the room sees it.</a:t>
-            </a:r>
-            <a:endParaRPr lang="en-US" sz="1350" dirty="0"/>
           </a:p>
         </p:txBody>
       </p:sp>
       <p:pic>
         <p:nvPicPr>
-          <p:cNvPr id="16" name="Image 0" descr="preencoded.png">    </p:cNvPr>
+          <p:cNvPr id="16" name="Image 0" descr="preencoded.png"/>
           <p:cNvPicPr>
             <a:picLocks noChangeAspect="1"/>
           </p:cNvPicPr>
           <p:nvPr/>
         </p:nvPicPr>
         <p:blipFill>
-          <a:blip r:embed="rId1"/>
+          <a:blip r:embed="rId3"/>
           <a:stretch>
             <a:fillRect/>
           </a:stretch>
@@ -8672,11 +8143,11 @@
           </a:bodyPr>
           <a:lstStyle/>
           <a:p>
-            <a:pPr algn="l" indent="0" marL="0">
-              <a:buNone/>
-            </a:pPr>
-            <a:r>
-              <a:rPr lang="en-US" sz="1200" spc="264" kern="0" dirty="0">
+            <a:pPr marL="0" indent="0" algn="l">
+              <a:buNone/>
+            </a:pPr>
+            <a:r>
+              <a:rPr lang="en-US" sz="1200" kern="0" spc="264" dirty="0">
                 <a:solidFill>
                   <a:srgbClr val="969696"/>
                 </a:solidFill>
@@ -8706,6 +8177,7 @@
         <a:solidFill>
           <a:srgbClr val="000000"/>
         </a:solidFill>
+        <a:effectLst/>
       </p:bgPr>
     </p:bg>
     <p:spTree>
@@ -8745,11 +8217,11 @@
           </a:bodyPr>
           <a:lstStyle/>
           <a:p>
-            <a:pPr algn="l" indent="0" marL="0">
-              <a:buNone/>
-            </a:pPr>
-            <a:r>
-              <a:rPr lang="en-US" sz="1500" spc="450" kern="0" dirty="0">
+            <a:pPr marL="0" indent="0" algn="l">
+              <a:buNone/>
+            </a:pPr>
+            <a:r>
+              <a:rPr lang="en-US" sz="1500" kern="0" spc="450" dirty="0">
                 <a:solidFill>
                   <a:srgbClr val="36CDFF"/>
                 </a:solidFill>
@@ -8786,7 +8258,7 @@
           </a:bodyPr>
           <a:lstStyle/>
           <a:p>
-            <a:pPr algn="l" indent="0" marL="0">
+            <a:pPr marL="0" indent="0" algn="l">
               <a:lnSpc>
                 <a:spcPct val="78261"/>
               </a:lnSpc>
@@ -8828,6 +8300,13 @@
           </a:solidFill>
           <a:ln/>
         </p:spPr>
+        <p:txBody>
+          <a:bodyPr/>
+          <a:lstStyle/>
+          <a:p>
+            <a:endParaRPr lang="en-US"/>
+          </a:p>
+        </p:txBody>
       </p:sp>
       <p:sp>
         <p:nvSpPr>
@@ -8852,7 +8331,7 @@
           </a:bodyPr>
           <a:lstStyle/>
           <a:p>
-            <a:pPr algn="l" indent="0" marL="0">
+            <a:pPr marL="0" indent="0" algn="l">
               <a:buNone/>
             </a:pPr>
             <a:r>
@@ -8893,7 +8372,7 @@
           </a:bodyPr>
           <a:lstStyle/>
           <a:p>
-            <a:pPr algn="l" indent="0" marL="0">
+            <a:pPr marL="0" indent="0" algn="l">
               <a:lnSpc>
                 <a:spcPct val="108696"/>
               </a:lnSpc>
@@ -8937,7 +8416,7 @@
           </a:bodyPr>
           <a:lstStyle/>
           <a:p>
-            <a:pPr algn="l" indent="0" marL="0">
+            <a:pPr marL="0" indent="0" algn="l">
               <a:lnSpc>
                 <a:spcPct val="126545"/>
               </a:lnSpc>
@@ -8979,6 +8458,13 @@
           </a:solidFill>
           <a:ln/>
         </p:spPr>
+        <p:txBody>
+          <a:bodyPr/>
+          <a:lstStyle/>
+          <a:p>
+            <a:endParaRPr lang="en-US"/>
+          </a:p>
+        </p:txBody>
       </p:sp>
       <p:sp>
         <p:nvSpPr>
@@ -9003,7 +8489,7 @@
           </a:bodyPr>
           <a:lstStyle/>
           <a:p>
-            <a:pPr algn="l" indent="0" marL="0">
+            <a:pPr marL="0" indent="0" algn="l">
               <a:buNone/>
             </a:pPr>
             <a:r>
@@ -9044,7 +8530,7 @@
           </a:bodyPr>
           <a:lstStyle/>
           <a:p>
-            <a:pPr algn="l" indent="0" marL="0">
+            <a:pPr marL="0" indent="0" algn="l">
               <a:lnSpc>
                 <a:spcPct val="108696"/>
               </a:lnSpc>
@@ -9084,11 +8570,11 @@
         </p:spPr>
         <p:txBody>
           <a:bodyPr wrap="square" lIns="25400" tIns="25400" rIns="25400" bIns="25400" rtlCol="0" anchor="t">
-            <a:normAutofit/>
-          </a:bodyPr>
-          <a:lstStyle/>
-          <a:p>
-            <a:pPr algn="l" indent="0" marL="0">
+            <a:normAutofit lnSpcReduction="10000"/>
+          </a:bodyPr>
+          <a:lstStyle/>
+          <a:p>
+            <a:pPr marL="0" indent="0" algn="l">
               <a:lnSpc>
                 <a:spcPct val="126545"/>
               </a:lnSpc>
@@ -9130,6 +8616,13 @@
           </a:solidFill>
           <a:ln/>
         </p:spPr>
+        <p:txBody>
+          <a:bodyPr/>
+          <a:lstStyle/>
+          <a:p>
+            <a:endParaRPr lang="en-US"/>
+          </a:p>
+        </p:txBody>
       </p:sp>
       <p:sp>
         <p:nvSpPr>
@@ -9154,7 +8647,7 @@
           </a:bodyPr>
           <a:lstStyle/>
           <a:p>
-            <a:pPr algn="l" indent="0" marL="0">
+            <a:pPr marL="0" indent="0" algn="l">
               <a:buNone/>
             </a:pPr>
             <a:r>
@@ -9195,7 +8688,7 @@
           </a:bodyPr>
           <a:lstStyle/>
           <a:p>
-            <a:pPr algn="l" indent="0" marL="0">
+            <a:pPr marL="0" indent="0" algn="l">
               <a:lnSpc>
                 <a:spcPct val="108696"/>
               </a:lnSpc>
@@ -9239,7 +8732,7 @@
           </a:bodyPr>
           <a:lstStyle/>
           <a:p>
-            <a:pPr algn="l" indent="0" marL="0">
+            <a:pPr marL="0" indent="0" algn="l">
               <a:lnSpc>
                 <a:spcPct val="126545"/>
               </a:lnSpc>
@@ -9281,6 +8774,13 @@
           </a:solidFill>
           <a:ln/>
         </p:spPr>
+        <p:txBody>
+          <a:bodyPr/>
+          <a:lstStyle/>
+          <a:p>
+            <a:endParaRPr lang="en-US"/>
+          </a:p>
+        </p:txBody>
       </p:sp>
       <p:sp>
         <p:nvSpPr>
@@ -9305,7 +8805,7 @@
           </a:bodyPr>
           <a:lstStyle/>
           <a:p>
-            <a:pPr algn="l" indent="0" marL="0">
+            <a:pPr marL="0" indent="0" algn="l">
               <a:buNone/>
             </a:pPr>
             <a:r>
@@ -9346,7 +8846,7 @@
           </a:bodyPr>
           <a:lstStyle/>
           <a:p>
-            <a:pPr algn="l" indent="0" marL="0">
+            <a:pPr marL="0" indent="0" algn="l">
               <a:lnSpc>
                 <a:spcPct val="108696"/>
               </a:lnSpc>
@@ -9386,11 +8886,11 @@
         </p:spPr>
         <p:txBody>
           <a:bodyPr wrap="square" lIns="25400" tIns="25400" rIns="25400" bIns="25400" rtlCol="0" anchor="t">
-            <a:normAutofit/>
-          </a:bodyPr>
-          <a:lstStyle/>
-          <a:p>
-            <a:pPr algn="l" indent="0" marL="0">
+            <a:normAutofit lnSpcReduction="10000"/>
+          </a:bodyPr>
+          <a:lstStyle/>
+          <a:p>
+            <a:pPr marL="0" indent="0" algn="l">
               <a:lnSpc>
                 <a:spcPct val="126545"/>
               </a:lnSpc>
@@ -9405,7 +8905,7 @@
                 <a:ea typeface="Arial" pitchFamily="34" charset="-122"/>
                 <a:cs typeface="Arial" pitchFamily="34" charset="-120"/>
               </a:rPr>
-              <a:t>A cleverer attack can be better and still not score — grading checks a mechanism. Improvise after you have passed, and show us.</a:t>
+              <a:t>A cleverer attack can be better and still not score — grading checks a mechanism. Improvise after you have passed and show us.</a:t>
             </a:r>
             <a:endParaRPr lang="en-US" sz="1800" dirty="0"/>
           </a:p>
@@ -9413,14 +8913,14 @@
       </p:sp>
       <p:pic>
         <p:nvPicPr>
-          <p:cNvPr id="20" name="Image 0" descr="preencoded.png">    </p:cNvPr>
+          <p:cNvPr id="20" name="Image 0" descr="preencoded.png"/>
           <p:cNvPicPr>
             <a:picLocks noChangeAspect="1"/>
           </p:cNvPicPr>
           <p:nvPr/>
         </p:nvPicPr>
         <p:blipFill>
-          <a:blip r:embed="rId1"/>
+          <a:blip r:embed="rId3"/>
           <a:stretch>
             <a:fillRect/>
           </a:stretch>
@@ -9458,11 +8958,11 @@
           </a:bodyPr>
           <a:lstStyle/>
           <a:p>
-            <a:pPr algn="l" indent="0" marL="0">
-              <a:buNone/>
-            </a:pPr>
-            <a:r>
-              <a:rPr lang="en-US" sz="1200" spc="264" kern="0" dirty="0">
+            <a:pPr marL="0" indent="0" algn="l">
+              <a:buNone/>
+            </a:pPr>
+            <a:r>
+              <a:rPr lang="en-US" sz="1200" kern="0" spc="264" dirty="0">
                 <a:solidFill>
                   <a:srgbClr val="969696"/>
                 </a:solidFill>
@@ -9777,4 +9277,319 @@
     </a:ext>
   </a:extLst>
 </a:theme>
+</file>
+
+<file path=ppt/theme/theme2.xml><?xml version="1.0" encoding="utf-8"?>
+<a:theme xmlns:a="http://schemas.openxmlformats.org/drawingml/2006/main" name="Office Theme">
+  <a:themeElements>
+    <a:clrScheme name="Office">
+      <a:dk1>
+        <a:sysClr val="windowText" lastClr="000000"/>
+      </a:dk1>
+      <a:lt1>
+        <a:sysClr val="window" lastClr="FFFFFF"/>
+      </a:lt1>
+      <a:dk2>
+        <a:srgbClr val="0E2841"/>
+      </a:dk2>
+      <a:lt2>
+        <a:srgbClr val="E8E8E8"/>
+      </a:lt2>
+      <a:accent1>
+        <a:srgbClr val="156082"/>
+      </a:accent1>
+      <a:accent2>
+        <a:srgbClr val="E97132"/>
+      </a:accent2>
+      <a:accent3>
+        <a:srgbClr val="196B24"/>
+      </a:accent3>
+      <a:accent4>
+        <a:srgbClr val="0F9ED5"/>
+      </a:accent4>
+      <a:accent5>
+        <a:srgbClr val="A02B93"/>
+      </a:accent5>
+      <a:accent6>
+        <a:srgbClr val="4EA72E"/>
+      </a:accent6>
+      <a:hlink>
+        <a:srgbClr val="467886"/>
+      </a:hlink>
+      <a:folHlink>
+        <a:srgbClr val="96607D"/>
+      </a:folHlink>
+    </a:clrScheme>
+    <a:fontScheme name="Office">
+      <a:majorFont>
+        <a:latin typeface="Aptos Display" panose="02110004020202020204"/>
+        <a:ea typeface=""/>
+        <a:cs typeface=""/>
+        <a:font script="Jpan" typeface="游ゴシック Light"/>
+        <a:font script="Hang" typeface="맑은 고딕"/>
+        <a:font script="Hans" typeface="等线 Light"/>
+        <a:font script="Hant" typeface="新細明體"/>
+        <a:font script="Arab" typeface="Times New Roman"/>
+        <a:font script="Hebr" typeface="Times New Roman"/>
+        <a:font script="Thai" typeface="Angsana New"/>
+        <a:font script="Ethi" typeface="Nyala"/>
+        <a:font script="Beng" typeface="Vrinda"/>
+        <a:font script="Gujr" typeface="Shruti"/>
+        <a:font script="Khmr" typeface="MoolBoran"/>
+        <a:font script="Knda" typeface="Tunga"/>
+        <a:font script="Guru" typeface="Raavi"/>
+        <a:font script="Cans" typeface="Euphemia"/>
+        <a:font script="Cher" typeface="Plantagenet Cherokee"/>
+        <a:font script="Yiii" typeface="Microsoft Yi Baiti"/>
+        <a:font script="Tibt" typeface="Microsoft Himalaya"/>
+        <a:font script="Thaa" typeface="MV Boli"/>
+        <a:font script="Deva" typeface="Mangal"/>
+        <a:font script="Telu" typeface="Gautami"/>
+        <a:font script="Taml" typeface="Latha"/>
+        <a:font script="Syrc" typeface="Estrangelo Edessa"/>
+        <a:font script="Orya" typeface="Kalinga"/>
+        <a:font script="Mlym" typeface="Kartika"/>
+        <a:font script="Laoo" typeface="DokChampa"/>
+        <a:font script="Sinh" typeface="Iskoola Pota"/>
+        <a:font script="Mong" typeface="Mongolian Baiti"/>
+        <a:font script="Viet" typeface="Times New Roman"/>
+        <a:font script="Uigh" typeface="Microsoft Uighur"/>
+        <a:font script="Geor" typeface="Sylfaen"/>
+        <a:font script="Armn" typeface="Arial"/>
+        <a:font script="Bugi" typeface="Leelawadee UI"/>
+        <a:font script="Bopo" typeface="Microsoft JhengHei"/>
+        <a:font script="Java" typeface="Javanese Text"/>
+        <a:font script="Lisu" typeface="Segoe UI"/>
+        <a:font script="Mymr" typeface="Myanmar Text"/>
+        <a:font script="Nkoo" typeface="Ebrima"/>
+        <a:font script="Olck" typeface="Nirmala UI"/>
+        <a:font script="Osma" typeface="Ebrima"/>
+        <a:font script="Phag" typeface="Phagspa"/>
+        <a:font script="Syrn" typeface="Estrangelo Edessa"/>
+        <a:font script="Syrj" typeface="Estrangelo Edessa"/>
+        <a:font script="Syre" typeface="Estrangelo Edessa"/>
+        <a:font script="Sora" typeface="Nirmala UI"/>
+        <a:font script="Tale" typeface="Microsoft Tai Le"/>
+        <a:font script="Talu" typeface="Microsoft New Tai Lue"/>
+        <a:font script="Tfng" typeface="Ebrima"/>
+      </a:majorFont>
+      <a:minorFont>
+        <a:latin typeface="Aptos" panose="02110004020202020204"/>
+        <a:ea typeface=""/>
+        <a:cs typeface=""/>
+        <a:font script="Jpan" typeface="游ゴシック"/>
+        <a:font script="Hang" typeface="맑은 고딕"/>
+        <a:font script="Hans" typeface="等线"/>
+        <a:font script="Hant" typeface="新細明體"/>
+        <a:font script="Arab" typeface="Arial"/>
+        <a:font script="Hebr" typeface="Arial"/>
+        <a:font script="Thai" typeface="Cordia New"/>
+        <a:font script="Ethi" typeface="Nyala"/>
+        <a:font script="Beng" typeface="Vrinda"/>
+        <a:font script="Gujr" typeface="Shruti"/>
+        <a:font script="Khmr" typeface="DaunPenh"/>
+        <a:font script="Knda" typeface="Tunga"/>
+        <a:font script="Guru" typeface="Raavi"/>
+        <a:font script="Cans" typeface="Euphemia"/>
+        <a:font script="Cher" typeface="Plantagenet Cherokee"/>
+        <a:font script="Yiii" typeface="Microsoft Yi Baiti"/>
+        <a:font script="Tibt" typeface="Microsoft Himalaya"/>
+        <a:font script="Thaa" typeface="MV Boli"/>
+        <a:font script="Deva" typeface="Mangal"/>
+        <a:font script="Telu" typeface="Gautami"/>
+        <a:font script="Taml" typeface="Latha"/>
+        <a:font script="Syrc" typeface="Estrangelo Edessa"/>
+        <a:font script="Orya" typeface="Kalinga"/>
+        <a:font script="Mlym" typeface="Kartika"/>
+        <a:font script="Laoo" typeface="DokChampa"/>
+        <a:font script="Sinh" typeface="Iskoola Pota"/>
+        <a:font script="Mong" typeface="Mongolian Baiti"/>
+        <a:font script="Viet" typeface="Arial"/>
+        <a:font script="Uigh" typeface="Microsoft Uighur"/>
+        <a:font script="Geor" typeface="Sylfaen"/>
+        <a:font script="Armn" typeface="Arial"/>
+        <a:font script="Bugi" typeface="Leelawadee UI"/>
+        <a:font script="Bopo" typeface="Microsoft JhengHei"/>
+        <a:font script="Java" typeface="Javanese Text"/>
+        <a:font script="Lisu" typeface="Segoe UI"/>
+        <a:font script="Mymr" typeface="Myanmar Text"/>
+        <a:font script="Nkoo" typeface="Ebrima"/>
+        <a:font script="Olck" typeface="Nirmala UI"/>
+        <a:font script="Osma" typeface="Ebrima"/>
+        <a:font script="Phag" typeface="Phagspa"/>
+        <a:font script="Syrn" typeface="Estrangelo Edessa"/>
+        <a:font script="Syrj" typeface="Estrangelo Edessa"/>
+        <a:font script="Syre" typeface="Estrangelo Edessa"/>
+        <a:font script="Sora" typeface="Nirmala UI"/>
+        <a:font script="Tale" typeface="Microsoft Tai Le"/>
+        <a:font script="Talu" typeface="Microsoft New Tai Lue"/>
+        <a:font script="Tfng" typeface="Ebrima"/>
+      </a:minorFont>
+    </a:fontScheme>
+    <a:fmtScheme name="Office">
+      <a:fillStyleLst>
+        <a:solidFill>
+          <a:schemeClr val="phClr"/>
+        </a:solidFill>
+        <a:gradFill rotWithShape="1">
+          <a:gsLst>
+            <a:gs pos="0">
+              <a:schemeClr val="phClr">
+                <a:lumMod val="110000"/>
+                <a:satMod val="105000"/>
+                <a:tint val="67000"/>
+              </a:schemeClr>
+            </a:gs>
+            <a:gs pos="50000">
+              <a:schemeClr val="phClr">
+                <a:lumMod val="105000"/>
+                <a:satMod val="103000"/>
+                <a:tint val="73000"/>
+              </a:schemeClr>
+            </a:gs>
+            <a:gs pos="100000">
+              <a:schemeClr val="phClr">
+                <a:lumMod val="105000"/>
+                <a:satMod val="109000"/>
+                <a:tint val="81000"/>
+              </a:schemeClr>
+            </a:gs>
+          </a:gsLst>
+          <a:lin ang="5400000" scaled="0"/>
+        </a:gradFill>
+        <a:gradFill rotWithShape="1">
+          <a:gsLst>
+            <a:gs pos="0">
+              <a:schemeClr val="phClr">
+                <a:satMod val="103000"/>
+                <a:lumMod val="102000"/>
+                <a:tint val="94000"/>
+              </a:schemeClr>
+            </a:gs>
+            <a:gs pos="50000">
+              <a:schemeClr val="phClr">
+                <a:satMod val="110000"/>
+                <a:lumMod val="100000"/>
+                <a:shade val="100000"/>
+              </a:schemeClr>
+            </a:gs>
+            <a:gs pos="100000">
+              <a:schemeClr val="phClr">
+                <a:lumMod val="99000"/>
+                <a:satMod val="120000"/>
+                <a:shade val="78000"/>
+              </a:schemeClr>
+            </a:gs>
+          </a:gsLst>
+          <a:lin ang="5400000" scaled="0"/>
+        </a:gradFill>
+      </a:fillStyleLst>
+      <a:lnStyleLst>
+        <a:ln w="12700" cap="flat" cmpd="sng" algn="ctr">
+          <a:solidFill>
+            <a:schemeClr val="phClr"/>
+          </a:solidFill>
+          <a:prstDash val="solid"/>
+          <a:miter lim="800000"/>
+        </a:ln>
+        <a:ln w="19050" cap="flat" cmpd="sng" algn="ctr">
+          <a:solidFill>
+            <a:schemeClr val="phClr"/>
+          </a:solidFill>
+          <a:prstDash val="solid"/>
+          <a:miter lim="800000"/>
+        </a:ln>
+        <a:ln w="25400" cap="flat" cmpd="sng" algn="ctr">
+          <a:solidFill>
+            <a:schemeClr val="phClr"/>
+          </a:solidFill>
+          <a:prstDash val="solid"/>
+          <a:miter lim="800000"/>
+        </a:ln>
+      </a:lnStyleLst>
+      <a:effectStyleLst>
+        <a:effectStyle>
+          <a:effectLst/>
+        </a:effectStyle>
+        <a:effectStyle>
+          <a:effectLst/>
+        </a:effectStyle>
+        <a:effectStyle>
+          <a:effectLst>
+            <a:outerShdw blurRad="57150" dist="19050" dir="5400000" algn="ctr" rotWithShape="0">
+              <a:srgbClr val="000000">
+                <a:alpha val="63000"/>
+              </a:srgbClr>
+            </a:outerShdw>
+          </a:effectLst>
+        </a:effectStyle>
+      </a:effectStyleLst>
+      <a:bgFillStyleLst>
+        <a:solidFill>
+          <a:schemeClr val="phClr"/>
+        </a:solidFill>
+        <a:solidFill>
+          <a:schemeClr val="phClr">
+            <a:tint val="95000"/>
+            <a:satMod val="170000"/>
+          </a:schemeClr>
+        </a:solidFill>
+        <a:gradFill rotWithShape="1">
+          <a:gsLst>
+            <a:gs pos="0">
+              <a:schemeClr val="phClr">
+                <a:tint val="93000"/>
+                <a:satMod val="150000"/>
+                <a:shade val="98000"/>
+                <a:lumMod val="102000"/>
+              </a:schemeClr>
+            </a:gs>
+            <a:gs pos="50000">
+              <a:schemeClr val="phClr">
+                <a:tint val="98000"/>
+                <a:satMod val="130000"/>
+                <a:shade val="90000"/>
+                <a:lumMod val="103000"/>
+              </a:schemeClr>
+            </a:gs>
+            <a:gs pos="100000">
+              <a:schemeClr val="phClr">
+                <a:shade val="63000"/>
+                <a:satMod val="120000"/>
+              </a:schemeClr>
+            </a:gs>
+          </a:gsLst>
+          <a:lin ang="5400000" scaled="0"/>
+        </a:gradFill>
+      </a:bgFillStyleLst>
+    </a:fmtScheme>
+  </a:themeElements>
+  <a:objectDefaults>
+    <a:lnDef>
+      <a:spPr/>
+      <a:bodyPr/>
+      <a:lstStyle/>
+      <a:style>
+        <a:lnRef idx="2">
+          <a:schemeClr val="accent1"/>
+        </a:lnRef>
+        <a:fillRef idx="0">
+          <a:schemeClr val="accent1"/>
+        </a:fillRef>
+        <a:effectRef idx="1">
+          <a:schemeClr val="accent1"/>
+        </a:effectRef>
+        <a:fontRef idx="minor">
+          <a:schemeClr val="tx1"/>
+        </a:fontRef>
+      </a:style>
+    </a:lnDef>
+  </a:objectDefaults>
+  <a:extraClrSchemeLst/>
+  <a:extLst>
+    <a:ext uri="{05A4C25C-085E-4340-85A3-A5531E510DB2}">
+      <thm15:themeFamily xmlns:thm15="http://schemas.microsoft.com/office/thememl/2012/main" name="Office Theme" id="{2E142A2C-CD16-42D6-873A-C26D2A0506FA}" vid="{1BDDFF52-6CD6-40A5-AB3C-68EB2F1E4D0A}"/>
+    </a:ext>
+  </a:extLst>
+</a:theme>
 </file>